--- a/DAEN489S26/week13_slides.pptx
+++ b/DAEN489S26/week13_slides.pptx
@@ -5,21 +5,40 @@
     <p:sldMasterId id="2147483660" r:id="rId1"/>
   </p:sldMasterIdLst>
   <p:notesMasterIdLst>
-    <p:notesMasterId r:id="rId14"/>
+    <p:notesMasterId r:id="rId33"/>
   </p:notesMasterIdLst>
   <p:sldIdLst>
     <p:sldId id="256" r:id="rId2"/>
-    <p:sldId id="365" r:id="rId3"/>
-    <p:sldId id="359" r:id="rId4"/>
-    <p:sldId id="345" r:id="rId5"/>
-    <p:sldId id="346" r:id="rId6"/>
-    <p:sldId id="364" r:id="rId7"/>
-    <p:sldId id="363" r:id="rId8"/>
-    <p:sldId id="362" r:id="rId9"/>
-    <p:sldId id="354" r:id="rId10"/>
-    <p:sldId id="366" r:id="rId11"/>
-    <p:sldId id="367" r:id="rId12"/>
-    <p:sldId id="343" r:id="rId13"/>
+    <p:sldId id="369" r:id="rId3"/>
+    <p:sldId id="370" r:id="rId4"/>
+    <p:sldId id="371" r:id="rId5"/>
+    <p:sldId id="372" r:id="rId6"/>
+    <p:sldId id="379" r:id="rId7"/>
+    <p:sldId id="381" r:id="rId8"/>
+    <p:sldId id="382" r:id="rId9"/>
+    <p:sldId id="383" r:id="rId10"/>
+    <p:sldId id="384" r:id="rId11"/>
+    <p:sldId id="386" r:id="rId12"/>
+    <p:sldId id="385" r:id="rId13"/>
+    <p:sldId id="387" r:id="rId14"/>
+    <p:sldId id="378" r:id="rId15"/>
+    <p:sldId id="374" r:id="rId16"/>
+    <p:sldId id="375" r:id="rId17"/>
+    <p:sldId id="376" r:id="rId18"/>
+    <p:sldId id="377" r:id="rId19"/>
+    <p:sldId id="343" r:id="rId20"/>
+    <p:sldId id="380" r:id="rId21"/>
+    <p:sldId id="365" r:id="rId22"/>
+    <p:sldId id="359" r:id="rId23"/>
+    <p:sldId id="345" r:id="rId24"/>
+    <p:sldId id="346" r:id="rId25"/>
+    <p:sldId id="364" r:id="rId26"/>
+    <p:sldId id="363" r:id="rId27"/>
+    <p:sldId id="362" r:id="rId28"/>
+    <p:sldId id="354" r:id="rId29"/>
+    <p:sldId id="366" r:id="rId30"/>
+    <p:sldId id="367" r:id="rId31"/>
+    <p:sldId id="368" r:id="rId32"/>
   </p:sldIdLst>
   <p:sldSz cx="9144000" cy="6858000" type="screen4x3"/>
   <p:notesSz cx="6858000" cy="9144000"/>
@@ -119,38 +138,6 @@
     </a:lvl9pPr>
   </p:defaultTextStyle>
   <p:extLst>
-    <p:ext uri="{521415D9-36F7-43E2-AB2F-B90AF26B5E84}">
-      <p14:sectionLst xmlns:p14="http://schemas.microsoft.com/office/powerpoint/2010/main">
-        <p14:section name="Intro" id="{B5A1FBEB-8E98-2648-AACA-444C6CF94B58}">
-          <p14:sldIdLst>
-            <p14:sldId id="256"/>
-          </p14:sldIdLst>
-        </p14:section>
-        <p14:section name="Review" id="{726521BA-6FDD-E141-85CC-06ADFED5112F}">
-          <p14:sldIdLst>
-            <p14:sldId id="365"/>
-            <p14:sldId id="359"/>
-            <p14:sldId id="345"/>
-            <p14:sldId id="346"/>
-            <p14:sldId id="364"/>
-            <p14:sldId id="363"/>
-            <p14:sldId id="362"/>
-            <p14:sldId id="354"/>
-          </p14:sldIdLst>
-        </p14:section>
-        <p14:section name="Regression" id="{33B13A44-D93C-8E43-A76A-DA40F1DCD619}">
-          <p14:sldIdLst>
-            <p14:sldId id="366"/>
-            <p14:sldId id="367"/>
-          </p14:sldIdLst>
-        </p14:section>
-        <p14:section name="References" id="{80CE1547-8FED-EB40-BEB2-D4CEAADA67FE}">
-          <p14:sldIdLst>
-            <p14:sldId id="343"/>
-          </p14:sldIdLst>
-        </p14:section>
-      </p14:sectionLst>
-    </p:ext>
     <p:ext uri="{EFAFB233-063F-42B5-8137-9DF3F51BA10A}">
       <p15:sldGuideLst xmlns:p15="http://schemas.microsoft.com/office/powerpoint/2012/main"/>
     </p:ext>
@@ -2550,13 +2537,6 @@
           <a:p>
             <a:r>
               <a:rPr lang="en-US" dirty="0"/>
-              <a:t>Spatial Analysis and</a:t>
-            </a:r>
-            <a:br>
-              <a:rPr lang="en-US" dirty="0"/>
-            </a:br>
-            <a:r>
-              <a:rPr lang="en-US" dirty="0"/>
               <a:t>Spatial Regression</a:t>
             </a:r>
           </a:p>
@@ -2647,13 +2627,7 @@
   <p:cSld>
     <p:spTree>
       <p:nvGrpSpPr>
-        <p:cNvPr id="1" name="">
-          <a:extLst>
-            <a:ext uri="{FF2B5EF4-FFF2-40B4-BE49-F238E27FC236}">
-              <a16:creationId xmlns:a16="http://schemas.microsoft.com/office/drawing/2014/main" id="{A43DDC0E-5DA0-EE3A-EDF8-D128EB0C43CB}"/>
-            </a:ext>
-          </a:extLst>
-        </p:cNvPr>
+        <p:cNvPr id="1" name=""/>
         <p:cNvGrpSpPr/>
         <p:nvPr/>
       </p:nvGrpSpPr>
@@ -2667,263 +2641,10 @@
       </p:grpSpPr>
       <p:sp>
         <p:nvSpPr>
-          <p:cNvPr id="7" name="Content Placeholder 2">
+          <p:cNvPr id="2" name="Slide Number Placeholder 1">
             <a:extLst>
               <a:ext uri="{FF2B5EF4-FFF2-40B4-BE49-F238E27FC236}">
-                <a16:creationId xmlns:a16="http://schemas.microsoft.com/office/drawing/2014/main" id="{E64F6C3B-E080-8481-B871-FBA1CF1A564A}"/>
-              </a:ext>
-            </a:extLst>
-          </p:cNvPr>
-          <p:cNvSpPr txBox="1">
-            <a:spLocks/>
-          </p:cNvSpPr>
-          <p:nvPr/>
-        </p:nvSpPr>
-        <p:spPr>
-          <a:xfrm>
-            <a:off x="4572000" y="1592494"/>
-            <a:ext cx="4114801" cy="4763858"/>
-          </a:xfrm>
-          <a:prstGeom prst="rect">
-            <a:avLst/>
-          </a:prstGeom>
-        </p:spPr>
-        <p:txBody>
-          <a:bodyPr vert="horz" lIns="91440" tIns="45720" rIns="91440" bIns="45720" rtlCol="0">
-            <a:noAutofit/>
-          </a:bodyPr>
-          <a:lstStyle>
-            <a:lvl1pPr marL="228600" indent="-228600" algn="l" defTabSz="914400" rtl="0" eaLnBrk="1" latinLnBrk="0" hangingPunct="1">
-              <a:lnSpc>
-                <a:spcPct val="90000"/>
-              </a:lnSpc>
-              <a:spcBef>
-                <a:spcPts val="1000"/>
-              </a:spcBef>
-              <a:buFont typeface="Arial" panose="020B0604020202020204" pitchFamily="34" charset="0"/>
-              <a:buChar char="•"/>
-              <a:defRPr sz="2000" kern="1200">
-                <a:solidFill>
-                  <a:schemeClr val="tx1"/>
-                </a:solidFill>
-                <a:latin typeface="+mn-lt"/>
-                <a:ea typeface="+mn-ea"/>
-                <a:cs typeface="+mn-cs"/>
-              </a:defRPr>
-            </a:lvl1pPr>
-            <a:lvl2pPr marL="685800" indent="-228600" algn="l" defTabSz="914400" rtl="0" eaLnBrk="1" latinLnBrk="0" hangingPunct="1">
-              <a:lnSpc>
-                <a:spcPct val="90000"/>
-              </a:lnSpc>
-              <a:spcBef>
-                <a:spcPts val="500"/>
-              </a:spcBef>
-              <a:buFont typeface="Arial" panose="020B0604020202020204" pitchFamily="34" charset="0"/>
-              <a:buChar char="•"/>
-              <a:defRPr sz="2000" kern="1200">
-                <a:solidFill>
-                  <a:schemeClr val="tx1"/>
-                </a:solidFill>
-                <a:latin typeface="+mn-lt"/>
-                <a:ea typeface="+mn-ea"/>
-                <a:cs typeface="+mn-cs"/>
-              </a:defRPr>
-            </a:lvl2pPr>
-            <a:lvl3pPr marL="1143000" indent="-228600" algn="l" defTabSz="914400" rtl="0" eaLnBrk="1" latinLnBrk="0" hangingPunct="1">
-              <a:lnSpc>
-                <a:spcPct val="90000"/>
-              </a:lnSpc>
-              <a:spcBef>
-                <a:spcPts val="500"/>
-              </a:spcBef>
-              <a:buFont typeface="Arial" panose="020B0604020202020204" pitchFamily="34" charset="0"/>
-              <a:buChar char="•"/>
-              <a:defRPr sz="2000" kern="1200">
-                <a:solidFill>
-                  <a:schemeClr val="tx1"/>
-                </a:solidFill>
-                <a:latin typeface="+mn-lt"/>
-                <a:ea typeface="+mn-ea"/>
-                <a:cs typeface="+mn-cs"/>
-              </a:defRPr>
-            </a:lvl3pPr>
-            <a:lvl4pPr marL="1600200" indent="-228600" algn="l" defTabSz="914400" rtl="0" eaLnBrk="1" latinLnBrk="0" hangingPunct="1">
-              <a:lnSpc>
-                <a:spcPct val="90000"/>
-              </a:lnSpc>
-              <a:spcBef>
-                <a:spcPts val="500"/>
-              </a:spcBef>
-              <a:buFont typeface="Arial" panose="020B0604020202020204" pitchFamily="34" charset="0"/>
-              <a:buChar char="•"/>
-              <a:defRPr sz="1800" kern="1200">
-                <a:solidFill>
-                  <a:schemeClr val="tx1"/>
-                </a:solidFill>
-                <a:latin typeface="+mn-lt"/>
-                <a:ea typeface="+mn-ea"/>
-                <a:cs typeface="+mn-cs"/>
-              </a:defRPr>
-            </a:lvl4pPr>
-            <a:lvl5pPr marL="2057400" indent="-228600" algn="l" defTabSz="914400" rtl="0" eaLnBrk="1" latinLnBrk="0" hangingPunct="1">
-              <a:lnSpc>
-                <a:spcPct val="90000"/>
-              </a:lnSpc>
-              <a:spcBef>
-                <a:spcPts val="500"/>
-              </a:spcBef>
-              <a:buFont typeface="Arial" panose="020B0604020202020204" pitchFamily="34" charset="0"/>
-              <a:buChar char="•"/>
-              <a:defRPr sz="1800" kern="1200">
-                <a:solidFill>
-                  <a:schemeClr val="tx1"/>
-                </a:solidFill>
-                <a:latin typeface="+mn-lt"/>
-                <a:ea typeface="+mn-ea"/>
-                <a:cs typeface="+mn-cs"/>
-              </a:defRPr>
-            </a:lvl5pPr>
-            <a:lvl6pPr marL="2514600" indent="-228600" algn="l" defTabSz="914400" rtl="0" eaLnBrk="1" latinLnBrk="0" hangingPunct="1">
-              <a:lnSpc>
-                <a:spcPct val="90000"/>
-              </a:lnSpc>
-              <a:spcBef>
-                <a:spcPts val="500"/>
-              </a:spcBef>
-              <a:buFont typeface="Arial" panose="020B0604020202020204" pitchFamily="34" charset="0"/>
-              <a:buChar char="•"/>
-              <a:defRPr sz="1800" kern="1200">
-                <a:solidFill>
-                  <a:schemeClr val="tx1"/>
-                </a:solidFill>
-                <a:latin typeface="+mn-lt"/>
-                <a:ea typeface="+mn-ea"/>
-                <a:cs typeface="+mn-cs"/>
-              </a:defRPr>
-            </a:lvl6pPr>
-            <a:lvl7pPr marL="2971800" indent="-228600" algn="l" defTabSz="914400" rtl="0" eaLnBrk="1" latinLnBrk="0" hangingPunct="1">
-              <a:lnSpc>
-                <a:spcPct val="90000"/>
-              </a:lnSpc>
-              <a:spcBef>
-                <a:spcPts val="500"/>
-              </a:spcBef>
-              <a:buFont typeface="Arial" panose="020B0604020202020204" pitchFamily="34" charset="0"/>
-              <a:buChar char="•"/>
-              <a:defRPr sz="1800" kern="1200">
-                <a:solidFill>
-                  <a:schemeClr val="tx1"/>
-                </a:solidFill>
-                <a:latin typeface="+mn-lt"/>
-                <a:ea typeface="+mn-ea"/>
-                <a:cs typeface="+mn-cs"/>
-              </a:defRPr>
-            </a:lvl7pPr>
-            <a:lvl8pPr marL="3429000" indent="-228600" algn="l" defTabSz="914400" rtl="0" eaLnBrk="1" latinLnBrk="0" hangingPunct="1">
-              <a:lnSpc>
-                <a:spcPct val="90000"/>
-              </a:lnSpc>
-              <a:spcBef>
-                <a:spcPts val="500"/>
-              </a:spcBef>
-              <a:buFont typeface="Arial" panose="020B0604020202020204" pitchFamily="34" charset="0"/>
-              <a:buChar char="•"/>
-              <a:defRPr sz="1800" kern="1200">
-                <a:solidFill>
-                  <a:schemeClr val="tx1"/>
-                </a:solidFill>
-                <a:latin typeface="+mn-lt"/>
-                <a:ea typeface="+mn-ea"/>
-                <a:cs typeface="+mn-cs"/>
-              </a:defRPr>
-            </a:lvl8pPr>
-            <a:lvl9pPr marL="3886200" indent="-228600" algn="l" defTabSz="914400" rtl="0" eaLnBrk="1" latinLnBrk="0" hangingPunct="1">
-              <a:lnSpc>
-                <a:spcPct val="90000"/>
-              </a:lnSpc>
-              <a:spcBef>
-                <a:spcPts val="500"/>
-              </a:spcBef>
-              <a:buFont typeface="Arial" panose="020B0604020202020204" pitchFamily="34" charset="0"/>
-              <a:buChar char="•"/>
-              <a:defRPr sz="1800" kern="1200">
-                <a:solidFill>
-                  <a:schemeClr val="tx1"/>
-                </a:solidFill>
-                <a:latin typeface="+mn-lt"/>
-                <a:ea typeface="+mn-ea"/>
-                <a:cs typeface="+mn-cs"/>
-              </a:defRPr>
-            </a:lvl9pPr>
-          </a:lstStyle>
-          <a:p>
-            <a:endParaRPr lang="en-US" sz="1400" dirty="0"/>
-          </a:p>
-        </p:txBody>
-      </p:sp>
-      <p:sp>
-        <p:nvSpPr>
-          <p:cNvPr id="2" name="Title 1">
-            <a:extLst>
-              <a:ext uri="{FF2B5EF4-FFF2-40B4-BE49-F238E27FC236}">
-                <a16:creationId xmlns:a16="http://schemas.microsoft.com/office/drawing/2014/main" id="{764CE543-5136-9DAC-AD2A-BD1F66260BDB}"/>
-              </a:ext>
-            </a:extLst>
-          </p:cNvPr>
-          <p:cNvSpPr>
-            <a:spLocks noGrp="1"/>
-          </p:cNvSpPr>
-          <p:nvPr>
-            <p:ph type="title"/>
-          </p:nvPr>
-        </p:nvSpPr>
-        <p:spPr/>
-        <p:txBody>
-          <a:bodyPr anchor="ctr"/>
-          <a:lstStyle/>
-          <a:p>
-            <a:endParaRPr lang="en-US" b="1" dirty="0"/>
-          </a:p>
-        </p:txBody>
-      </p:sp>
-      <p:sp>
-        <p:nvSpPr>
-          <p:cNvPr id="3" name="Content Placeholder 2">
-            <a:extLst>
-              <a:ext uri="{FF2B5EF4-FFF2-40B4-BE49-F238E27FC236}">
-                <a16:creationId xmlns:a16="http://schemas.microsoft.com/office/drawing/2014/main" id="{94446766-CBCB-2B6F-08AE-D5CC516889E5}"/>
-              </a:ext>
-            </a:extLst>
-          </p:cNvPr>
-          <p:cNvSpPr>
-            <a:spLocks noGrp="1"/>
-          </p:cNvSpPr>
-          <p:nvPr>
-            <p:ph idx="1"/>
-          </p:nvPr>
-        </p:nvSpPr>
-        <p:spPr>
-          <a:xfrm>
-            <a:off x="457199" y="1140432"/>
-            <a:ext cx="4114801" cy="5215920"/>
-          </a:xfrm>
-        </p:spPr>
-        <p:txBody>
-          <a:bodyPr>
-            <a:noAutofit/>
-          </a:bodyPr>
-          <a:lstStyle/>
-          <a:p>
-            <a:endParaRPr lang="en-US" sz="1400" dirty="0"/>
-          </a:p>
-        </p:txBody>
-      </p:sp>
-      <p:sp>
-        <p:nvSpPr>
-          <p:cNvPr id="4" name="Slide Number Placeholder 3">
-            <a:extLst>
-              <a:ext uri="{FF2B5EF4-FFF2-40B4-BE49-F238E27FC236}">
-                <a16:creationId xmlns:a16="http://schemas.microsoft.com/office/drawing/2014/main" id="{638B7185-82F2-4A5E-5B22-7EC65200C79A}"/>
+                <a16:creationId xmlns:a16="http://schemas.microsoft.com/office/drawing/2014/main" id="{6638C54C-91BF-F40E-9473-6F480AFF9041}"/>
               </a:ext>
             </a:extLst>
           </p:cNvPr>
@@ -2947,265 +2668,12 @@
           </a:p>
         </p:txBody>
       </p:sp>
-      <p:sp>
-        <p:nvSpPr>
-          <p:cNvPr id="6" name="Content Placeholder 2">
+      <p:pic>
+        <p:nvPicPr>
+          <p:cNvPr id="3" name="Picture 2">
             <a:extLst>
               <a:ext uri="{FF2B5EF4-FFF2-40B4-BE49-F238E27FC236}">
-                <a16:creationId xmlns:a16="http://schemas.microsoft.com/office/drawing/2014/main" id="{6DDD6E87-C414-6EF1-6F29-4CF989BA00F7}"/>
-              </a:ext>
-            </a:extLst>
-          </p:cNvPr>
-          <p:cNvSpPr txBox="1">
-            <a:spLocks/>
-          </p:cNvSpPr>
-          <p:nvPr/>
-        </p:nvSpPr>
-        <p:spPr>
-          <a:xfrm>
-            <a:off x="4849402" y="2969231"/>
-            <a:ext cx="3837398" cy="3567036"/>
-          </a:xfrm>
-          <a:prstGeom prst="rect">
-            <a:avLst/>
-          </a:prstGeom>
-        </p:spPr>
-        <p:txBody>
-          <a:bodyPr vert="horz" lIns="91440" tIns="45720" rIns="91440" bIns="45720" rtlCol="0">
-            <a:noAutofit/>
-          </a:bodyPr>
-          <a:lstStyle>
-            <a:lvl1pPr marL="228600" indent="-228600" algn="l" defTabSz="914400" rtl="0" eaLnBrk="1" latinLnBrk="0" hangingPunct="1">
-              <a:lnSpc>
-                <a:spcPct val="90000"/>
-              </a:lnSpc>
-              <a:spcBef>
-                <a:spcPts val="1000"/>
-              </a:spcBef>
-              <a:buFont typeface="Arial" panose="020B0604020202020204" pitchFamily="34" charset="0"/>
-              <a:buChar char="•"/>
-              <a:defRPr sz="2000" kern="1200">
-                <a:solidFill>
-                  <a:schemeClr val="tx1"/>
-                </a:solidFill>
-                <a:latin typeface="+mn-lt"/>
-                <a:ea typeface="+mn-ea"/>
-                <a:cs typeface="+mn-cs"/>
-              </a:defRPr>
-            </a:lvl1pPr>
-            <a:lvl2pPr marL="685800" indent="-228600" algn="l" defTabSz="914400" rtl="0" eaLnBrk="1" latinLnBrk="0" hangingPunct="1">
-              <a:lnSpc>
-                <a:spcPct val="90000"/>
-              </a:lnSpc>
-              <a:spcBef>
-                <a:spcPts val="500"/>
-              </a:spcBef>
-              <a:buFont typeface="Arial" panose="020B0604020202020204" pitchFamily="34" charset="0"/>
-              <a:buChar char="•"/>
-              <a:defRPr sz="2000" kern="1200">
-                <a:solidFill>
-                  <a:schemeClr val="tx1"/>
-                </a:solidFill>
-                <a:latin typeface="+mn-lt"/>
-                <a:ea typeface="+mn-ea"/>
-                <a:cs typeface="+mn-cs"/>
-              </a:defRPr>
-            </a:lvl2pPr>
-            <a:lvl3pPr marL="1143000" indent="-228600" algn="l" defTabSz="914400" rtl="0" eaLnBrk="1" latinLnBrk="0" hangingPunct="1">
-              <a:lnSpc>
-                <a:spcPct val="90000"/>
-              </a:lnSpc>
-              <a:spcBef>
-                <a:spcPts val="500"/>
-              </a:spcBef>
-              <a:buFont typeface="Arial" panose="020B0604020202020204" pitchFamily="34" charset="0"/>
-              <a:buChar char="•"/>
-              <a:defRPr sz="2000" kern="1200">
-                <a:solidFill>
-                  <a:schemeClr val="tx1"/>
-                </a:solidFill>
-                <a:latin typeface="+mn-lt"/>
-                <a:ea typeface="+mn-ea"/>
-                <a:cs typeface="+mn-cs"/>
-              </a:defRPr>
-            </a:lvl3pPr>
-            <a:lvl4pPr marL="1600200" indent="-228600" algn="l" defTabSz="914400" rtl="0" eaLnBrk="1" latinLnBrk="0" hangingPunct="1">
-              <a:lnSpc>
-                <a:spcPct val="90000"/>
-              </a:lnSpc>
-              <a:spcBef>
-                <a:spcPts val="500"/>
-              </a:spcBef>
-              <a:buFont typeface="Arial" panose="020B0604020202020204" pitchFamily="34" charset="0"/>
-              <a:buChar char="•"/>
-              <a:defRPr sz="1800" kern="1200">
-                <a:solidFill>
-                  <a:schemeClr val="tx1"/>
-                </a:solidFill>
-                <a:latin typeface="+mn-lt"/>
-                <a:ea typeface="+mn-ea"/>
-                <a:cs typeface="+mn-cs"/>
-              </a:defRPr>
-            </a:lvl4pPr>
-            <a:lvl5pPr marL="2057400" indent="-228600" algn="l" defTabSz="914400" rtl="0" eaLnBrk="1" latinLnBrk="0" hangingPunct="1">
-              <a:lnSpc>
-                <a:spcPct val="90000"/>
-              </a:lnSpc>
-              <a:spcBef>
-                <a:spcPts val="500"/>
-              </a:spcBef>
-              <a:buFont typeface="Arial" panose="020B0604020202020204" pitchFamily="34" charset="0"/>
-              <a:buChar char="•"/>
-              <a:defRPr sz="1800" kern="1200">
-                <a:solidFill>
-                  <a:schemeClr val="tx1"/>
-                </a:solidFill>
-                <a:latin typeface="+mn-lt"/>
-                <a:ea typeface="+mn-ea"/>
-                <a:cs typeface="+mn-cs"/>
-              </a:defRPr>
-            </a:lvl5pPr>
-            <a:lvl6pPr marL="2514600" indent="-228600" algn="l" defTabSz="914400" rtl="0" eaLnBrk="1" latinLnBrk="0" hangingPunct="1">
-              <a:lnSpc>
-                <a:spcPct val="90000"/>
-              </a:lnSpc>
-              <a:spcBef>
-                <a:spcPts val="500"/>
-              </a:spcBef>
-              <a:buFont typeface="Arial" panose="020B0604020202020204" pitchFamily="34" charset="0"/>
-              <a:buChar char="•"/>
-              <a:defRPr sz="1800" kern="1200">
-                <a:solidFill>
-                  <a:schemeClr val="tx1"/>
-                </a:solidFill>
-                <a:latin typeface="+mn-lt"/>
-                <a:ea typeface="+mn-ea"/>
-                <a:cs typeface="+mn-cs"/>
-              </a:defRPr>
-            </a:lvl6pPr>
-            <a:lvl7pPr marL="2971800" indent="-228600" algn="l" defTabSz="914400" rtl="0" eaLnBrk="1" latinLnBrk="0" hangingPunct="1">
-              <a:lnSpc>
-                <a:spcPct val="90000"/>
-              </a:lnSpc>
-              <a:spcBef>
-                <a:spcPts val="500"/>
-              </a:spcBef>
-              <a:buFont typeface="Arial" panose="020B0604020202020204" pitchFamily="34" charset="0"/>
-              <a:buChar char="•"/>
-              <a:defRPr sz="1800" kern="1200">
-                <a:solidFill>
-                  <a:schemeClr val="tx1"/>
-                </a:solidFill>
-                <a:latin typeface="+mn-lt"/>
-                <a:ea typeface="+mn-ea"/>
-                <a:cs typeface="+mn-cs"/>
-              </a:defRPr>
-            </a:lvl7pPr>
-            <a:lvl8pPr marL="3429000" indent="-228600" algn="l" defTabSz="914400" rtl="0" eaLnBrk="1" latinLnBrk="0" hangingPunct="1">
-              <a:lnSpc>
-                <a:spcPct val="90000"/>
-              </a:lnSpc>
-              <a:spcBef>
-                <a:spcPts val="500"/>
-              </a:spcBef>
-              <a:buFont typeface="Arial" panose="020B0604020202020204" pitchFamily="34" charset="0"/>
-              <a:buChar char="•"/>
-              <a:defRPr sz="1800" kern="1200">
-                <a:solidFill>
-                  <a:schemeClr val="tx1"/>
-                </a:solidFill>
-                <a:latin typeface="+mn-lt"/>
-                <a:ea typeface="+mn-ea"/>
-                <a:cs typeface="+mn-cs"/>
-              </a:defRPr>
-            </a:lvl8pPr>
-            <a:lvl9pPr marL="3886200" indent="-228600" algn="l" defTabSz="914400" rtl="0" eaLnBrk="1" latinLnBrk="0" hangingPunct="1">
-              <a:lnSpc>
-                <a:spcPct val="90000"/>
-              </a:lnSpc>
-              <a:spcBef>
-                <a:spcPts val="500"/>
-              </a:spcBef>
-              <a:buFont typeface="Arial" panose="020B0604020202020204" pitchFamily="34" charset="0"/>
-              <a:buChar char="•"/>
-              <a:defRPr sz="1800" kern="1200">
-                <a:solidFill>
-                  <a:schemeClr val="tx1"/>
-                </a:solidFill>
-                <a:latin typeface="+mn-lt"/>
-                <a:ea typeface="+mn-ea"/>
-                <a:cs typeface="+mn-cs"/>
-              </a:defRPr>
-            </a:lvl9pPr>
-          </a:lstStyle>
-          <a:p>
-            <a:pPr marL="0" indent="0">
-              <a:lnSpc>
-                <a:spcPct val="100000"/>
-              </a:lnSpc>
-              <a:spcBef>
-                <a:spcPts val="400"/>
-              </a:spcBef>
-              <a:buNone/>
-            </a:pPr>
-            <a:endParaRPr lang="en-US" sz="1200" b="1" dirty="0">
-              <a:solidFill>
-                <a:schemeClr val="tx1">
-                  <a:lumMod val="65000"/>
-                  <a:lumOff val="35000"/>
-                </a:schemeClr>
-              </a:solidFill>
-              <a:latin typeface="Consolas" panose="020B0609020204030204" pitchFamily="49" charset="0"/>
-              <a:cs typeface="Consolas" panose="020B0609020204030204" pitchFamily="49" charset="0"/>
-            </a:endParaRPr>
-          </a:p>
-        </p:txBody>
-      </p:sp>
-      <p:sp>
-        <p:nvSpPr>
-          <p:cNvPr id="10" name="TextBox 9">
-            <a:extLst>
-              <a:ext uri="{FF2B5EF4-FFF2-40B4-BE49-F238E27FC236}">
-                <a16:creationId xmlns:a16="http://schemas.microsoft.com/office/drawing/2014/main" id="{5A3B335F-4906-89D3-2B3E-A7CA0CE24A42}"/>
-              </a:ext>
-            </a:extLst>
-          </p:cNvPr>
-          <p:cNvSpPr txBox="1"/>
-          <p:nvPr/>
-        </p:nvSpPr>
-        <p:spPr>
-          <a:xfrm>
-            <a:off x="6537034" y="2640014"/>
-            <a:ext cx="184730" cy="235962"/>
-          </a:xfrm>
-          <a:prstGeom prst="rect">
-            <a:avLst/>
-          </a:prstGeom>
-          <a:solidFill>
-            <a:srgbClr val="C00000"/>
-          </a:solidFill>
-        </p:spPr>
-        <p:txBody>
-          <a:bodyPr wrap="none" rtlCol="0" anchor="ctr">
-            <a:spAutoFit/>
-          </a:bodyPr>
-          <a:lstStyle/>
-          <a:p>
-            <a:pPr algn="ctr"/>
-            <a:endParaRPr lang="en-US" sz="1400" baseline="30000" dirty="0">
-              <a:solidFill>
-                <a:schemeClr val="bg1"/>
-              </a:solidFill>
-            </a:endParaRPr>
-          </a:p>
-        </p:txBody>
-      </p:sp>
-      <p:pic>
-        <p:nvPicPr>
-          <p:cNvPr id="12" name="Picture 11">
-            <a:extLst>
-              <a:ext uri="{FF2B5EF4-FFF2-40B4-BE49-F238E27FC236}">
-                <a16:creationId xmlns:a16="http://schemas.microsoft.com/office/drawing/2014/main" id="{34B9EA82-EEB5-96AF-068D-36F9ECFD8F78}"/>
+                <a16:creationId xmlns:a16="http://schemas.microsoft.com/office/drawing/2014/main" id="{502B510E-B2D3-659C-1284-801FCCE50646}"/>
               </a:ext>
             </a:extLst>
           </p:cNvPr>
@@ -3222,8 +2690,8 @@
         </p:blipFill>
         <p:spPr>
           <a:xfrm>
-            <a:off x="685800" y="4071084"/>
-            <a:ext cx="7772400" cy="2374704"/>
+            <a:off x="184935" y="277403"/>
+            <a:ext cx="5355313" cy="4572000"/>
           </a:xfrm>
           <a:prstGeom prst="rect">
             <a:avLst/>
@@ -3233,7 +2701,7 @@
     </p:spTree>
     <p:extLst>
       <p:ext uri="{BB962C8B-B14F-4D97-AF65-F5344CB8AC3E}">
-        <p14:creationId xmlns:p14="http://schemas.microsoft.com/office/powerpoint/2010/main" val="3387503856"/>
+        <p14:creationId xmlns:p14="http://schemas.microsoft.com/office/powerpoint/2010/main" val="2875138421"/>
       </p:ext>
     </p:extLst>
   </p:cSld>
@@ -3248,13 +2716,7 @@
   <p:cSld>
     <p:spTree>
       <p:nvGrpSpPr>
-        <p:cNvPr id="1" name="">
-          <a:extLst>
-            <a:ext uri="{FF2B5EF4-FFF2-40B4-BE49-F238E27FC236}">
-              <a16:creationId xmlns:a16="http://schemas.microsoft.com/office/drawing/2014/main" id="{2B74F36F-56ED-D413-3936-1775C02DE92F}"/>
-            </a:ext>
-          </a:extLst>
-        </p:cNvPr>
+        <p:cNvPr id="1" name=""/>
         <p:cNvGrpSpPr/>
         <p:nvPr/>
       </p:nvGrpSpPr>
@@ -3268,58 +2730,10 @@
       </p:grpSpPr>
       <p:sp>
         <p:nvSpPr>
-          <p:cNvPr id="3" name="Content Placeholder 2">
+          <p:cNvPr id="2" name="Slide Number Placeholder 1">
             <a:extLst>
               <a:ext uri="{FF2B5EF4-FFF2-40B4-BE49-F238E27FC236}">
-                <a16:creationId xmlns:a16="http://schemas.microsoft.com/office/drawing/2014/main" id="{1537507E-BEE7-1C3E-D954-248C666E769C}"/>
-              </a:ext>
-            </a:extLst>
-          </p:cNvPr>
-          <p:cNvSpPr>
-            <a:spLocks noGrp="1"/>
-          </p:cNvSpPr>
-          <p:nvPr>
-            <p:ph idx="1"/>
-          </p:nvPr>
-        </p:nvSpPr>
-        <p:spPr>
-          <a:xfrm>
-            <a:off x="457200" y="321734"/>
-            <a:ext cx="8229600" cy="6034618"/>
-          </a:xfrm>
-        </p:spPr>
-        <p:txBody>
-          <a:bodyPr>
-            <a:noAutofit/>
-          </a:bodyPr>
-          <a:lstStyle/>
-          <a:p>
-            <a:pPr marL="0" indent="0">
-              <a:buNone/>
-            </a:pPr>
-            <a:r>
-              <a:rPr lang="en-US" sz="2400" b="1" dirty="0"/>
-              <a:t>AA</a:t>
-            </a:r>
-          </a:p>
-          <a:p>
-            <a:r>
-              <a:rPr lang="en-US" sz="1600" dirty="0"/>
-              <a:t>AA</a:t>
-            </a:r>
-          </a:p>
-          <a:p>
-            <a:pPr lvl="2"/>
-            <a:endParaRPr lang="en-US" sz="1800" dirty="0"/>
-          </a:p>
-        </p:txBody>
-      </p:sp>
-      <p:sp>
-        <p:nvSpPr>
-          <p:cNvPr id="4" name="Slide Number Placeholder 3">
-            <a:extLst>
-              <a:ext uri="{FF2B5EF4-FFF2-40B4-BE49-F238E27FC236}">
-                <a16:creationId xmlns:a16="http://schemas.microsoft.com/office/drawing/2014/main" id="{DBF402D8-9403-798E-B33F-D6D5B3DE09C9}"/>
+                <a16:creationId xmlns:a16="http://schemas.microsoft.com/office/drawing/2014/main" id="{1AD0F190-FF91-CC3A-334E-D3D2FA543D51}"/>
               </a:ext>
             </a:extLst>
           </p:cNvPr>
@@ -3345,10 +2759,10 @@
       </p:sp>
       <p:pic>
         <p:nvPicPr>
-          <p:cNvPr id="7" name="Picture 6">
+          <p:cNvPr id="3" name="Picture 2">
             <a:extLst>
               <a:ext uri="{FF2B5EF4-FFF2-40B4-BE49-F238E27FC236}">
-                <a16:creationId xmlns:a16="http://schemas.microsoft.com/office/drawing/2014/main" id="{BEC47934-BEF8-097B-51C8-AFE9841C5E51}"/>
+                <a16:creationId xmlns:a16="http://schemas.microsoft.com/office/drawing/2014/main" id="{5E4EE078-135F-4BB9-145D-81082B135CF4}"/>
               </a:ext>
             </a:extLst>
           </p:cNvPr>
@@ -3365,78 +2779,18 @@
         </p:blipFill>
         <p:spPr>
           <a:xfrm>
-            <a:off x="685800" y="4071084"/>
-            <a:ext cx="7772400" cy="2374704"/>
+            <a:off x="685800" y="1959365"/>
+            <a:ext cx="7772400" cy="2939270"/>
           </a:xfrm>
           <a:prstGeom prst="rect">
             <a:avLst/>
           </a:prstGeom>
         </p:spPr>
       </p:pic>
-      <p:sp>
-        <p:nvSpPr>
-          <p:cNvPr id="10" name="Oval 9">
-            <a:extLst>
-              <a:ext uri="{FF2B5EF4-FFF2-40B4-BE49-F238E27FC236}">
-                <a16:creationId xmlns:a16="http://schemas.microsoft.com/office/drawing/2014/main" id="{2BC61E6C-FF64-6BBB-BC76-2294CE26E8EF}"/>
-              </a:ext>
-            </a:extLst>
-          </p:cNvPr>
-          <p:cNvSpPr>
-            <a:spLocks/>
-          </p:cNvSpPr>
-          <p:nvPr/>
-        </p:nvSpPr>
-        <p:spPr>
-          <a:xfrm>
-            <a:off x="3063240" y="3744024"/>
-            <a:ext cx="3017520" cy="2926080"/>
-          </a:xfrm>
-          <a:prstGeom prst="ellipse">
-            <a:avLst/>
-          </a:prstGeom>
-          <a:solidFill>
-            <a:srgbClr val="FFC000">
-              <a:alpha val="5098"/>
-            </a:srgbClr>
-          </a:solidFill>
-          <a:ln w="38100">
-            <a:solidFill>
-              <a:srgbClr val="C00000">
-                <a:alpha val="50196"/>
-              </a:srgbClr>
-            </a:solidFill>
-          </a:ln>
-        </p:spPr>
-        <p:style>
-          <a:lnRef idx="2">
-            <a:schemeClr val="accent1">
-              <a:shade val="15000"/>
-            </a:schemeClr>
-          </a:lnRef>
-          <a:fillRef idx="1">
-            <a:schemeClr val="accent1"/>
-          </a:fillRef>
-          <a:effectRef idx="0">
-            <a:schemeClr val="accent1"/>
-          </a:effectRef>
-          <a:fontRef idx="minor">
-            <a:schemeClr val="lt1"/>
-          </a:fontRef>
-        </p:style>
-        <p:txBody>
-          <a:bodyPr rtlCol="0" anchor="ctr"/>
-          <a:lstStyle/>
-          <a:p>
-            <a:pPr algn="ctr"/>
-            <a:endParaRPr lang="en-US"/>
-          </a:p>
-        </p:txBody>
-      </p:sp>
     </p:spTree>
     <p:extLst>
       <p:ext uri="{BB962C8B-B14F-4D97-AF65-F5344CB8AC3E}">
-        <p14:creationId xmlns:p14="http://schemas.microsoft.com/office/powerpoint/2010/main" val="963920275"/>
+        <p14:creationId xmlns:p14="http://schemas.microsoft.com/office/powerpoint/2010/main" val="2542536294"/>
       </p:ext>
     </p:extLst>
   </p:cSld>
@@ -3447,6 +2801,767 @@
 </file>
 
 <file path=ppt/slides/slide12.xml><?xml version="1.0" encoding="utf-8"?>
+<p:sld xmlns:a="http://schemas.openxmlformats.org/drawingml/2006/main" xmlns:r="http://schemas.openxmlformats.org/officeDocument/2006/relationships" xmlns:p="http://schemas.openxmlformats.org/presentationml/2006/main">
+  <p:cSld>
+    <p:spTree>
+      <p:nvGrpSpPr>
+        <p:cNvPr id="1" name=""/>
+        <p:cNvGrpSpPr/>
+        <p:nvPr/>
+      </p:nvGrpSpPr>
+      <p:grpSpPr>
+        <a:xfrm>
+          <a:off x="0" y="0"/>
+          <a:ext cx="0" cy="0"/>
+          <a:chOff x="0" y="0"/>
+          <a:chExt cx="0" cy="0"/>
+        </a:xfrm>
+      </p:grpSpPr>
+      <p:sp>
+        <p:nvSpPr>
+          <p:cNvPr id="2" name="Slide Number Placeholder 1">
+            <a:extLst>
+              <a:ext uri="{FF2B5EF4-FFF2-40B4-BE49-F238E27FC236}">
+                <a16:creationId xmlns:a16="http://schemas.microsoft.com/office/drawing/2014/main" id="{9F2DB83C-150A-8044-0466-2C627B7315F3}"/>
+              </a:ext>
+            </a:extLst>
+          </p:cNvPr>
+          <p:cNvSpPr>
+            <a:spLocks noGrp="1"/>
+          </p:cNvSpPr>
+          <p:nvPr>
+            <p:ph type="sldNum" sz="quarter" idx="12"/>
+          </p:nvPr>
+        </p:nvSpPr>
+        <p:spPr/>
+        <p:txBody>
+          <a:bodyPr/>
+          <a:lstStyle/>
+          <a:p>
+            <a:fld id="{C0343C75-1924-D247-85A3-0CB62E67E5D1}" type="slidenum">
+              <a:rPr lang="en-US" smtClean="0"/>
+              <a:t>12</a:t>
+            </a:fld>
+            <a:endParaRPr lang="en-US"/>
+          </a:p>
+        </p:txBody>
+      </p:sp>
+      <p:pic>
+        <p:nvPicPr>
+          <p:cNvPr id="4" name="Picture 3">
+            <a:extLst>
+              <a:ext uri="{FF2B5EF4-FFF2-40B4-BE49-F238E27FC236}">
+                <a16:creationId xmlns:a16="http://schemas.microsoft.com/office/drawing/2014/main" id="{53CE9035-42E1-B942-3BD8-BC91E083605C}"/>
+              </a:ext>
+            </a:extLst>
+          </p:cNvPr>
+          <p:cNvPicPr>
+            <a:picLocks noChangeAspect="1"/>
+          </p:cNvPicPr>
+          <p:nvPr/>
+        </p:nvPicPr>
+        <p:blipFill>
+          <a:blip r:embed="rId2"/>
+          <a:stretch>
+            <a:fillRect/>
+          </a:stretch>
+        </p:blipFill>
+        <p:spPr>
+          <a:xfrm>
+            <a:off x="317500" y="338996"/>
+            <a:ext cx="6311900" cy="3090004"/>
+          </a:xfrm>
+          <a:prstGeom prst="rect">
+            <a:avLst/>
+          </a:prstGeom>
+        </p:spPr>
+      </p:pic>
+    </p:spTree>
+    <p:extLst>
+      <p:ext uri="{BB962C8B-B14F-4D97-AF65-F5344CB8AC3E}">
+        <p14:creationId xmlns:p14="http://schemas.microsoft.com/office/powerpoint/2010/main" val="4280162803"/>
+      </p:ext>
+    </p:extLst>
+  </p:cSld>
+  <p:clrMapOvr>
+    <a:masterClrMapping/>
+  </p:clrMapOvr>
+</p:sld>
+</file>
+
+<file path=ppt/slides/slide13.xml><?xml version="1.0" encoding="utf-8"?>
+<p:sld xmlns:a="http://schemas.openxmlformats.org/drawingml/2006/main" xmlns:r="http://schemas.openxmlformats.org/officeDocument/2006/relationships" xmlns:p="http://schemas.openxmlformats.org/presentationml/2006/main">
+  <p:cSld>
+    <p:spTree>
+      <p:nvGrpSpPr>
+        <p:cNvPr id="1" name="">
+          <a:extLst>
+            <a:ext uri="{FF2B5EF4-FFF2-40B4-BE49-F238E27FC236}">
+              <a16:creationId xmlns:a16="http://schemas.microsoft.com/office/drawing/2014/main" id="{3CAB29BB-0FEF-FEF9-4D8D-68AE84E562BB}"/>
+            </a:ext>
+          </a:extLst>
+        </p:cNvPr>
+        <p:cNvGrpSpPr/>
+        <p:nvPr/>
+      </p:nvGrpSpPr>
+      <p:grpSpPr>
+        <a:xfrm>
+          <a:off x="0" y="0"/>
+          <a:ext cx="0" cy="0"/>
+          <a:chOff x="0" y="0"/>
+          <a:chExt cx="0" cy="0"/>
+        </a:xfrm>
+      </p:grpSpPr>
+      <p:sp>
+        <p:nvSpPr>
+          <p:cNvPr id="2" name="Slide Number Placeholder 1">
+            <a:extLst>
+              <a:ext uri="{FF2B5EF4-FFF2-40B4-BE49-F238E27FC236}">
+                <a16:creationId xmlns:a16="http://schemas.microsoft.com/office/drawing/2014/main" id="{8930FBD3-FF81-4968-C21B-E201658BC927}"/>
+              </a:ext>
+            </a:extLst>
+          </p:cNvPr>
+          <p:cNvSpPr>
+            <a:spLocks noGrp="1"/>
+          </p:cNvSpPr>
+          <p:nvPr>
+            <p:ph type="sldNum" sz="quarter" idx="12"/>
+          </p:nvPr>
+        </p:nvSpPr>
+        <p:spPr/>
+        <p:txBody>
+          <a:bodyPr/>
+          <a:lstStyle/>
+          <a:p>
+            <a:fld id="{C0343C75-1924-D247-85A3-0CB62E67E5D1}" type="slidenum">
+              <a:rPr lang="en-US" smtClean="0"/>
+              <a:t>13</a:t>
+            </a:fld>
+            <a:endParaRPr lang="en-US"/>
+          </a:p>
+        </p:txBody>
+      </p:sp>
+      <p:pic>
+        <p:nvPicPr>
+          <p:cNvPr id="3" name="Picture 2">
+            <a:extLst>
+              <a:ext uri="{FF2B5EF4-FFF2-40B4-BE49-F238E27FC236}">
+                <a16:creationId xmlns:a16="http://schemas.microsoft.com/office/drawing/2014/main" id="{F90958EE-0B34-F811-B62D-F2D4CF89D7BF}"/>
+              </a:ext>
+            </a:extLst>
+          </p:cNvPr>
+          <p:cNvPicPr>
+            <a:picLocks noChangeAspect="1"/>
+          </p:cNvPicPr>
+          <p:nvPr/>
+        </p:nvPicPr>
+        <p:blipFill>
+          <a:blip r:embed="rId2"/>
+          <a:stretch>
+            <a:fillRect/>
+          </a:stretch>
+        </p:blipFill>
+        <p:spPr>
+          <a:xfrm>
+            <a:off x="685800" y="1959365"/>
+            <a:ext cx="7772400" cy="2939270"/>
+          </a:xfrm>
+          <a:prstGeom prst="rect">
+            <a:avLst/>
+          </a:prstGeom>
+        </p:spPr>
+      </p:pic>
+    </p:spTree>
+    <p:extLst>
+      <p:ext uri="{BB962C8B-B14F-4D97-AF65-F5344CB8AC3E}">
+        <p14:creationId xmlns:p14="http://schemas.microsoft.com/office/powerpoint/2010/main" val="1510157717"/>
+      </p:ext>
+    </p:extLst>
+  </p:cSld>
+  <p:clrMapOvr>
+    <a:masterClrMapping/>
+  </p:clrMapOvr>
+</p:sld>
+</file>
+
+<file path=ppt/slides/slide14.xml><?xml version="1.0" encoding="utf-8"?>
+<p:sld xmlns:a="http://schemas.openxmlformats.org/drawingml/2006/main" xmlns:r="http://schemas.openxmlformats.org/officeDocument/2006/relationships" xmlns:p="http://schemas.openxmlformats.org/presentationml/2006/main">
+  <p:cSld>
+    <p:spTree>
+      <p:nvGrpSpPr>
+        <p:cNvPr id="1" name="">
+          <a:extLst>
+            <a:ext uri="{FF2B5EF4-FFF2-40B4-BE49-F238E27FC236}">
+              <a16:creationId xmlns:a16="http://schemas.microsoft.com/office/drawing/2014/main" id="{8558C95C-2417-2EC6-F33B-0057834A940B}"/>
+            </a:ext>
+          </a:extLst>
+        </p:cNvPr>
+        <p:cNvGrpSpPr/>
+        <p:nvPr/>
+      </p:nvGrpSpPr>
+      <p:grpSpPr>
+        <a:xfrm>
+          <a:off x="0" y="0"/>
+          <a:ext cx="0" cy="0"/>
+          <a:chOff x="0" y="0"/>
+          <a:chExt cx="0" cy="0"/>
+        </a:xfrm>
+      </p:grpSpPr>
+      <p:sp>
+        <p:nvSpPr>
+          <p:cNvPr id="2" name="Title 1">
+            <a:extLst>
+              <a:ext uri="{FF2B5EF4-FFF2-40B4-BE49-F238E27FC236}">
+                <a16:creationId xmlns:a16="http://schemas.microsoft.com/office/drawing/2014/main" id="{47CEBFAB-2516-61B1-C06B-91C19F7A56DB}"/>
+              </a:ext>
+            </a:extLst>
+          </p:cNvPr>
+          <p:cNvSpPr>
+            <a:spLocks noGrp="1"/>
+          </p:cNvSpPr>
+          <p:nvPr>
+            <p:ph type="title"/>
+          </p:nvPr>
+        </p:nvSpPr>
+        <p:spPr/>
+        <p:txBody>
+          <a:bodyPr/>
+          <a:lstStyle/>
+          <a:p>
+            <a:r>
+              <a:rPr lang="en-US" dirty="0"/>
+              <a:t>aa</a:t>
+            </a:r>
+          </a:p>
+        </p:txBody>
+      </p:sp>
+      <p:sp>
+        <p:nvSpPr>
+          <p:cNvPr id="4" name="Slide Number Placeholder 3">
+            <a:extLst>
+              <a:ext uri="{FF2B5EF4-FFF2-40B4-BE49-F238E27FC236}">
+                <a16:creationId xmlns:a16="http://schemas.microsoft.com/office/drawing/2014/main" id="{3BF67318-064C-DA98-641A-299BB7DFC1F6}"/>
+              </a:ext>
+            </a:extLst>
+          </p:cNvPr>
+          <p:cNvSpPr>
+            <a:spLocks noGrp="1"/>
+          </p:cNvSpPr>
+          <p:nvPr>
+            <p:ph type="sldNum" sz="quarter" idx="12"/>
+          </p:nvPr>
+        </p:nvSpPr>
+        <p:spPr/>
+        <p:txBody>
+          <a:bodyPr/>
+          <a:lstStyle/>
+          <a:p>
+            <a:fld id="{C0343C75-1924-D247-85A3-0CB62E67E5D1}" type="slidenum">
+              <a:rPr lang="en-US" smtClean="0"/>
+              <a:t>14</a:t>
+            </a:fld>
+            <a:endParaRPr lang="en-US"/>
+          </a:p>
+        </p:txBody>
+      </p:sp>
+    </p:spTree>
+    <p:extLst>
+      <p:ext uri="{BB962C8B-B14F-4D97-AF65-F5344CB8AC3E}">
+        <p14:creationId xmlns:p14="http://schemas.microsoft.com/office/powerpoint/2010/main" val="2412463908"/>
+      </p:ext>
+    </p:extLst>
+  </p:cSld>
+  <p:clrMapOvr>
+    <a:masterClrMapping/>
+  </p:clrMapOvr>
+</p:sld>
+</file>
+
+<file path=ppt/slides/slide15.xml><?xml version="1.0" encoding="utf-8"?>
+<p:sld xmlns:a="http://schemas.openxmlformats.org/drawingml/2006/main" xmlns:r="http://schemas.openxmlformats.org/officeDocument/2006/relationships" xmlns:p="http://schemas.openxmlformats.org/presentationml/2006/main">
+  <p:cSld>
+    <p:spTree>
+      <p:nvGrpSpPr>
+        <p:cNvPr id="1" name="">
+          <a:extLst>
+            <a:ext uri="{FF2B5EF4-FFF2-40B4-BE49-F238E27FC236}">
+              <a16:creationId xmlns:a16="http://schemas.microsoft.com/office/drawing/2014/main" id="{859C1444-5358-2247-09E5-9765D0D06B2C}"/>
+            </a:ext>
+          </a:extLst>
+        </p:cNvPr>
+        <p:cNvGrpSpPr/>
+        <p:nvPr/>
+      </p:nvGrpSpPr>
+      <p:grpSpPr>
+        <a:xfrm>
+          <a:off x="0" y="0"/>
+          <a:ext cx="0" cy="0"/>
+          <a:chOff x="0" y="0"/>
+          <a:chExt cx="0" cy="0"/>
+        </a:xfrm>
+      </p:grpSpPr>
+      <p:sp>
+        <p:nvSpPr>
+          <p:cNvPr id="2" name="Title 1">
+            <a:extLst>
+              <a:ext uri="{FF2B5EF4-FFF2-40B4-BE49-F238E27FC236}">
+                <a16:creationId xmlns:a16="http://schemas.microsoft.com/office/drawing/2014/main" id="{0BC79AD5-107F-93FE-B0DB-8F6A6CAD4BA2}"/>
+              </a:ext>
+            </a:extLst>
+          </p:cNvPr>
+          <p:cNvSpPr>
+            <a:spLocks noGrp="1"/>
+          </p:cNvSpPr>
+          <p:nvPr>
+            <p:ph type="title"/>
+          </p:nvPr>
+        </p:nvSpPr>
+        <p:spPr/>
+        <p:txBody>
+          <a:bodyPr/>
+          <a:lstStyle/>
+          <a:p>
+            <a:r>
+              <a:rPr lang="en-US" dirty="0"/>
+              <a:t>aa</a:t>
+            </a:r>
+          </a:p>
+        </p:txBody>
+      </p:sp>
+      <p:sp>
+        <p:nvSpPr>
+          <p:cNvPr id="3" name="Content Placeholder 2">
+            <a:extLst>
+              <a:ext uri="{FF2B5EF4-FFF2-40B4-BE49-F238E27FC236}">
+                <a16:creationId xmlns:a16="http://schemas.microsoft.com/office/drawing/2014/main" id="{B79001DF-AECC-F023-12BD-9BAB22A34D04}"/>
+              </a:ext>
+            </a:extLst>
+          </p:cNvPr>
+          <p:cNvSpPr>
+            <a:spLocks noGrp="1"/>
+          </p:cNvSpPr>
+          <p:nvPr>
+            <p:ph idx="1"/>
+          </p:nvPr>
+        </p:nvSpPr>
+        <p:spPr/>
+        <p:txBody>
+          <a:bodyPr/>
+          <a:lstStyle/>
+          <a:p>
+            <a:r>
+              <a:rPr lang="en-US" dirty="0"/>
+              <a:t>aa</a:t>
+            </a:r>
+          </a:p>
+        </p:txBody>
+      </p:sp>
+      <p:sp>
+        <p:nvSpPr>
+          <p:cNvPr id="4" name="Slide Number Placeholder 3">
+            <a:extLst>
+              <a:ext uri="{FF2B5EF4-FFF2-40B4-BE49-F238E27FC236}">
+                <a16:creationId xmlns:a16="http://schemas.microsoft.com/office/drawing/2014/main" id="{1822B3D8-0ED8-78A4-5954-946F5FBA6CE4}"/>
+              </a:ext>
+            </a:extLst>
+          </p:cNvPr>
+          <p:cNvSpPr>
+            <a:spLocks noGrp="1"/>
+          </p:cNvSpPr>
+          <p:nvPr>
+            <p:ph type="sldNum" sz="quarter" idx="12"/>
+          </p:nvPr>
+        </p:nvSpPr>
+        <p:spPr/>
+        <p:txBody>
+          <a:bodyPr/>
+          <a:lstStyle/>
+          <a:p>
+            <a:fld id="{C0343C75-1924-D247-85A3-0CB62E67E5D1}" type="slidenum">
+              <a:rPr lang="en-US" smtClean="0"/>
+              <a:t>15</a:t>
+            </a:fld>
+            <a:endParaRPr lang="en-US"/>
+          </a:p>
+        </p:txBody>
+      </p:sp>
+    </p:spTree>
+    <p:extLst>
+      <p:ext uri="{BB962C8B-B14F-4D97-AF65-F5344CB8AC3E}">
+        <p14:creationId xmlns:p14="http://schemas.microsoft.com/office/powerpoint/2010/main" val="1793995749"/>
+      </p:ext>
+    </p:extLst>
+  </p:cSld>
+  <p:clrMapOvr>
+    <a:masterClrMapping/>
+  </p:clrMapOvr>
+</p:sld>
+</file>
+
+<file path=ppt/slides/slide16.xml><?xml version="1.0" encoding="utf-8"?>
+<p:sld xmlns:a="http://schemas.openxmlformats.org/drawingml/2006/main" xmlns:r="http://schemas.openxmlformats.org/officeDocument/2006/relationships" xmlns:p="http://schemas.openxmlformats.org/presentationml/2006/main">
+  <p:cSld>
+    <p:spTree>
+      <p:nvGrpSpPr>
+        <p:cNvPr id="1" name="">
+          <a:extLst>
+            <a:ext uri="{FF2B5EF4-FFF2-40B4-BE49-F238E27FC236}">
+              <a16:creationId xmlns:a16="http://schemas.microsoft.com/office/drawing/2014/main" id="{0F6EF380-056E-6F85-B487-9370273A2F9A}"/>
+            </a:ext>
+          </a:extLst>
+        </p:cNvPr>
+        <p:cNvGrpSpPr/>
+        <p:nvPr/>
+      </p:nvGrpSpPr>
+      <p:grpSpPr>
+        <a:xfrm>
+          <a:off x="0" y="0"/>
+          <a:ext cx="0" cy="0"/>
+          <a:chOff x="0" y="0"/>
+          <a:chExt cx="0" cy="0"/>
+        </a:xfrm>
+      </p:grpSpPr>
+      <p:sp>
+        <p:nvSpPr>
+          <p:cNvPr id="2" name="Title 1">
+            <a:extLst>
+              <a:ext uri="{FF2B5EF4-FFF2-40B4-BE49-F238E27FC236}">
+                <a16:creationId xmlns:a16="http://schemas.microsoft.com/office/drawing/2014/main" id="{6621FD1F-A2F6-8506-51E9-6516D49899AC}"/>
+              </a:ext>
+            </a:extLst>
+          </p:cNvPr>
+          <p:cNvSpPr>
+            <a:spLocks noGrp="1"/>
+          </p:cNvSpPr>
+          <p:nvPr>
+            <p:ph type="title"/>
+          </p:nvPr>
+        </p:nvSpPr>
+        <p:spPr/>
+        <p:txBody>
+          <a:bodyPr/>
+          <a:lstStyle/>
+          <a:p>
+            <a:r>
+              <a:rPr lang="en-US" dirty="0"/>
+              <a:t>aa</a:t>
+            </a:r>
+          </a:p>
+        </p:txBody>
+      </p:sp>
+      <p:sp>
+        <p:nvSpPr>
+          <p:cNvPr id="3" name="Content Placeholder 2">
+            <a:extLst>
+              <a:ext uri="{FF2B5EF4-FFF2-40B4-BE49-F238E27FC236}">
+                <a16:creationId xmlns:a16="http://schemas.microsoft.com/office/drawing/2014/main" id="{C3E245CC-9289-BEA6-F547-6DA1DA6C6A29}"/>
+              </a:ext>
+            </a:extLst>
+          </p:cNvPr>
+          <p:cNvSpPr>
+            <a:spLocks noGrp="1"/>
+          </p:cNvSpPr>
+          <p:nvPr>
+            <p:ph idx="1"/>
+          </p:nvPr>
+        </p:nvSpPr>
+        <p:spPr/>
+        <p:txBody>
+          <a:bodyPr/>
+          <a:lstStyle/>
+          <a:p>
+            <a:r>
+              <a:rPr lang="en-US" dirty="0"/>
+              <a:t>aa</a:t>
+            </a:r>
+          </a:p>
+        </p:txBody>
+      </p:sp>
+      <p:sp>
+        <p:nvSpPr>
+          <p:cNvPr id="4" name="Slide Number Placeholder 3">
+            <a:extLst>
+              <a:ext uri="{FF2B5EF4-FFF2-40B4-BE49-F238E27FC236}">
+                <a16:creationId xmlns:a16="http://schemas.microsoft.com/office/drawing/2014/main" id="{689FB85E-86CD-A533-76E7-C0C920FED1CF}"/>
+              </a:ext>
+            </a:extLst>
+          </p:cNvPr>
+          <p:cNvSpPr>
+            <a:spLocks noGrp="1"/>
+          </p:cNvSpPr>
+          <p:nvPr>
+            <p:ph type="sldNum" sz="quarter" idx="12"/>
+          </p:nvPr>
+        </p:nvSpPr>
+        <p:spPr/>
+        <p:txBody>
+          <a:bodyPr/>
+          <a:lstStyle/>
+          <a:p>
+            <a:fld id="{C0343C75-1924-D247-85A3-0CB62E67E5D1}" type="slidenum">
+              <a:rPr lang="en-US" smtClean="0"/>
+              <a:t>16</a:t>
+            </a:fld>
+            <a:endParaRPr lang="en-US"/>
+          </a:p>
+        </p:txBody>
+      </p:sp>
+    </p:spTree>
+    <p:extLst>
+      <p:ext uri="{BB962C8B-B14F-4D97-AF65-F5344CB8AC3E}">
+        <p14:creationId xmlns:p14="http://schemas.microsoft.com/office/powerpoint/2010/main" val="2357090970"/>
+      </p:ext>
+    </p:extLst>
+  </p:cSld>
+  <p:clrMapOvr>
+    <a:masterClrMapping/>
+  </p:clrMapOvr>
+</p:sld>
+</file>
+
+<file path=ppt/slides/slide17.xml><?xml version="1.0" encoding="utf-8"?>
+<p:sld xmlns:a="http://schemas.openxmlformats.org/drawingml/2006/main" xmlns:r="http://schemas.openxmlformats.org/officeDocument/2006/relationships" xmlns:p="http://schemas.openxmlformats.org/presentationml/2006/main">
+  <p:cSld>
+    <p:spTree>
+      <p:nvGrpSpPr>
+        <p:cNvPr id="1" name="">
+          <a:extLst>
+            <a:ext uri="{FF2B5EF4-FFF2-40B4-BE49-F238E27FC236}">
+              <a16:creationId xmlns:a16="http://schemas.microsoft.com/office/drawing/2014/main" id="{4B300967-F7EA-4EE9-EFDC-42D773726F87}"/>
+            </a:ext>
+          </a:extLst>
+        </p:cNvPr>
+        <p:cNvGrpSpPr/>
+        <p:nvPr/>
+      </p:nvGrpSpPr>
+      <p:grpSpPr>
+        <a:xfrm>
+          <a:off x="0" y="0"/>
+          <a:ext cx="0" cy="0"/>
+          <a:chOff x="0" y="0"/>
+          <a:chExt cx="0" cy="0"/>
+        </a:xfrm>
+      </p:grpSpPr>
+      <p:sp>
+        <p:nvSpPr>
+          <p:cNvPr id="2" name="Title 1">
+            <a:extLst>
+              <a:ext uri="{FF2B5EF4-FFF2-40B4-BE49-F238E27FC236}">
+                <a16:creationId xmlns:a16="http://schemas.microsoft.com/office/drawing/2014/main" id="{27022A23-5FFF-7A33-256B-655B24C411D6}"/>
+              </a:ext>
+            </a:extLst>
+          </p:cNvPr>
+          <p:cNvSpPr>
+            <a:spLocks noGrp="1"/>
+          </p:cNvSpPr>
+          <p:nvPr>
+            <p:ph type="title"/>
+          </p:nvPr>
+        </p:nvSpPr>
+        <p:spPr/>
+        <p:txBody>
+          <a:bodyPr/>
+          <a:lstStyle/>
+          <a:p>
+            <a:r>
+              <a:rPr lang="en-US" dirty="0"/>
+              <a:t>aa</a:t>
+            </a:r>
+          </a:p>
+        </p:txBody>
+      </p:sp>
+      <p:sp>
+        <p:nvSpPr>
+          <p:cNvPr id="3" name="Content Placeholder 2">
+            <a:extLst>
+              <a:ext uri="{FF2B5EF4-FFF2-40B4-BE49-F238E27FC236}">
+                <a16:creationId xmlns:a16="http://schemas.microsoft.com/office/drawing/2014/main" id="{352EB2AF-851D-CE73-5F3F-7AA98DC100C0}"/>
+              </a:ext>
+            </a:extLst>
+          </p:cNvPr>
+          <p:cNvSpPr>
+            <a:spLocks noGrp="1"/>
+          </p:cNvSpPr>
+          <p:nvPr>
+            <p:ph idx="1"/>
+          </p:nvPr>
+        </p:nvSpPr>
+        <p:spPr/>
+        <p:txBody>
+          <a:bodyPr/>
+          <a:lstStyle/>
+          <a:p>
+            <a:r>
+              <a:rPr lang="en-US" dirty="0"/>
+              <a:t>aa</a:t>
+            </a:r>
+          </a:p>
+        </p:txBody>
+      </p:sp>
+      <p:sp>
+        <p:nvSpPr>
+          <p:cNvPr id="4" name="Slide Number Placeholder 3">
+            <a:extLst>
+              <a:ext uri="{FF2B5EF4-FFF2-40B4-BE49-F238E27FC236}">
+                <a16:creationId xmlns:a16="http://schemas.microsoft.com/office/drawing/2014/main" id="{63CCEDF4-F99B-A90F-BF24-9798BAD12C63}"/>
+              </a:ext>
+            </a:extLst>
+          </p:cNvPr>
+          <p:cNvSpPr>
+            <a:spLocks noGrp="1"/>
+          </p:cNvSpPr>
+          <p:nvPr>
+            <p:ph type="sldNum" sz="quarter" idx="12"/>
+          </p:nvPr>
+        </p:nvSpPr>
+        <p:spPr/>
+        <p:txBody>
+          <a:bodyPr/>
+          <a:lstStyle/>
+          <a:p>
+            <a:fld id="{C0343C75-1924-D247-85A3-0CB62E67E5D1}" type="slidenum">
+              <a:rPr lang="en-US" smtClean="0"/>
+              <a:t>17</a:t>
+            </a:fld>
+            <a:endParaRPr lang="en-US"/>
+          </a:p>
+        </p:txBody>
+      </p:sp>
+    </p:spTree>
+    <p:extLst>
+      <p:ext uri="{BB962C8B-B14F-4D97-AF65-F5344CB8AC3E}">
+        <p14:creationId xmlns:p14="http://schemas.microsoft.com/office/powerpoint/2010/main" val="2395486251"/>
+      </p:ext>
+    </p:extLst>
+  </p:cSld>
+  <p:clrMapOvr>
+    <a:masterClrMapping/>
+  </p:clrMapOvr>
+</p:sld>
+</file>
+
+<file path=ppt/slides/slide18.xml><?xml version="1.0" encoding="utf-8"?>
+<p:sld xmlns:a="http://schemas.openxmlformats.org/drawingml/2006/main" xmlns:r="http://schemas.openxmlformats.org/officeDocument/2006/relationships" xmlns:p="http://schemas.openxmlformats.org/presentationml/2006/main">
+  <p:cSld>
+    <p:spTree>
+      <p:nvGrpSpPr>
+        <p:cNvPr id="1" name="">
+          <a:extLst>
+            <a:ext uri="{FF2B5EF4-FFF2-40B4-BE49-F238E27FC236}">
+              <a16:creationId xmlns:a16="http://schemas.microsoft.com/office/drawing/2014/main" id="{C71D9625-5EE1-5835-8686-0E3AC36A3F1E}"/>
+            </a:ext>
+          </a:extLst>
+        </p:cNvPr>
+        <p:cNvGrpSpPr/>
+        <p:nvPr/>
+      </p:nvGrpSpPr>
+      <p:grpSpPr>
+        <a:xfrm>
+          <a:off x="0" y="0"/>
+          <a:ext cx="0" cy="0"/>
+          <a:chOff x="0" y="0"/>
+          <a:chExt cx="0" cy="0"/>
+        </a:xfrm>
+      </p:grpSpPr>
+      <p:sp>
+        <p:nvSpPr>
+          <p:cNvPr id="2" name="Title 1">
+            <a:extLst>
+              <a:ext uri="{FF2B5EF4-FFF2-40B4-BE49-F238E27FC236}">
+                <a16:creationId xmlns:a16="http://schemas.microsoft.com/office/drawing/2014/main" id="{7382477B-A168-5C55-193E-947497F401A6}"/>
+              </a:ext>
+            </a:extLst>
+          </p:cNvPr>
+          <p:cNvSpPr>
+            <a:spLocks noGrp="1"/>
+          </p:cNvSpPr>
+          <p:nvPr>
+            <p:ph type="title"/>
+          </p:nvPr>
+        </p:nvSpPr>
+        <p:spPr/>
+        <p:txBody>
+          <a:bodyPr/>
+          <a:lstStyle/>
+          <a:p>
+            <a:r>
+              <a:rPr lang="en-US" dirty="0"/>
+              <a:t>aa</a:t>
+            </a:r>
+          </a:p>
+        </p:txBody>
+      </p:sp>
+      <p:sp>
+        <p:nvSpPr>
+          <p:cNvPr id="3" name="Content Placeholder 2">
+            <a:extLst>
+              <a:ext uri="{FF2B5EF4-FFF2-40B4-BE49-F238E27FC236}">
+                <a16:creationId xmlns:a16="http://schemas.microsoft.com/office/drawing/2014/main" id="{0E9D33FF-F621-DEB5-2C31-094E8E4FB325}"/>
+              </a:ext>
+            </a:extLst>
+          </p:cNvPr>
+          <p:cNvSpPr>
+            <a:spLocks noGrp="1"/>
+          </p:cNvSpPr>
+          <p:nvPr>
+            <p:ph idx="1"/>
+          </p:nvPr>
+        </p:nvSpPr>
+        <p:spPr/>
+        <p:txBody>
+          <a:bodyPr/>
+          <a:lstStyle/>
+          <a:p>
+            <a:r>
+              <a:rPr lang="en-US" dirty="0"/>
+              <a:t>aa</a:t>
+            </a:r>
+          </a:p>
+        </p:txBody>
+      </p:sp>
+      <p:sp>
+        <p:nvSpPr>
+          <p:cNvPr id="4" name="Slide Number Placeholder 3">
+            <a:extLst>
+              <a:ext uri="{FF2B5EF4-FFF2-40B4-BE49-F238E27FC236}">
+                <a16:creationId xmlns:a16="http://schemas.microsoft.com/office/drawing/2014/main" id="{7B70EFD0-C6AE-72CB-16BA-2A1EA4E56C55}"/>
+              </a:ext>
+            </a:extLst>
+          </p:cNvPr>
+          <p:cNvSpPr>
+            <a:spLocks noGrp="1"/>
+          </p:cNvSpPr>
+          <p:nvPr>
+            <p:ph type="sldNum" sz="quarter" idx="12"/>
+          </p:nvPr>
+        </p:nvSpPr>
+        <p:spPr/>
+        <p:txBody>
+          <a:bodyPr/>
+          <a:lstStyle/>
+          <a:p>
+            <a:fld id="{C0343C75-1924-D247-85A3-0CB62E67E5D1}" type="slidenum">
+              <a:rPr lang="en-US" smtClean="0"/>
+              <a:t>18</a:t>
+            </a:fld>
+            <a:endParaRPr lang="en-US"/>
+          </a:p>
+        </p:txBody>
+      </p:sp>
+    </p:spTree>
+    <p:extLst>
+      <p:ext uri="{BB962C8B-B14F-4D97-AF65-F5344CB8AC3E}">
+        <p14:creationId xmlns:p14="http://schemas.microsoft.com/office/powerpoint/2010/main" val="2496428601"/>
+      </p:ext>
+    </p:extLst>
+  </p:cSld>
+  <p:clrMapOvr>
+    <a:masterClrMapping/>
+  </p:clrMapOvr>
+</p:sld>
+</file>
+
+<file path=ppt/slides/slide19.xml><?xml version="1.0" encoding="utf-8"?>
 <p:sld xmlns:a="http://schemas.openxmlformats.org/drawingml/2006/main" xmlns:r="http://schemas.openxmlformats.org/officeDocument/2006/relationships" xmlns:p="http://schemas.openxmlformats.org/presentationml/2006/main">
   <p:cSld>
     <p:bg>
@@ -3500,7 +3615,11 @@
           <a:p>
             <a:r>
               <a:rPr lang="en-US" b="1" dirty="0"/>
-              <a:t>References</a:t>
+              <a:t>Learn More</a:t>
+            </a:r>
+            <a:r>
+              <a:rPr lang="en-US" dirty="0"/>
+              <a:t> (Vignettes)</a:t>
             </a:r>
           </a:p>
         </p:txBody>
@@ -3526,47 +3645,6 @@
           <a:bodyPr/>
           <a:lstStyle/>
           <a:p>
-            <a:r>
-              <a:rPr lang="en-US" dirty="0"/>
-              <a:t>Spatial Data Science</a:t>
-            </a:r>
-            <a:br>
-              <a:rPr lang="en-US" dirty="0"/>
-            </a:br>
-            <a:r>
-              <a:rPr lang="en-US" sz="1800" dirty="0">
-                <a:hlinkClick r:id="rId2"/>
-              </a:rPr>
-              <a:t>https://r-spatial.org/book/</a:t>
-            </a:r>
-            <a:endParaRPr lang="en-US" dirty="0"/>
-          </a:p>
-          <a:p>
-            <a:r>
-              <a:rPr lang="en-US" dirty="0"/>
-              <a:t>Exploratory Spatial Data Analysis</a:t>
-            </a:r>
-            <a:br>
-              <a:rPr lang="en-US" dirty="0"/>
-            </a:br>
-            <a:r>
-              <a:rPr lang="en-US" sz="1800" dirty="0">
-                <a:hlinkClick r:id="rId3"/>
-              </a:rPr>
-              <a:t>https://cran.r-project.org/web/packages/geostan/vignettes/measuring-sa.html</a:t>
-            </a:r>
-            <a:endParaRPr lang="en-US" sz="1800" dirty="0"/>
-          </a:p>
-          <a:p>
-            <a:endParaRPr lang="en-US" dirty="0"/>
-          </a:p>
-          <a:p>
-            <a:endParaRPr lang="en-US" dirty="0"/>
-          </a:p>
-          <a:p>
-            <a:endParaRPr lang="en-US" dirty="0"/>
-          </a:p>
-          <a:p>
             <a:endParaRPr lang="en-US" dirty="0"/>
           </a:p>
         </p:txBody>
@@ -3594,7 +3672,7 @@
           <a:p>
             <a:fld id="{C0343C75-1924-D247-85A3-0CB62E67E5D1}" type="slidenum">
               <a:rPr lang="en-US" smtClean="0"/>
-              <a:t>12</a:t>
+              <a:t>19</a:t>
             </a:fld>
             <a:endParaRPr lang="en-US"/>
           </a:p>
@@ -3615,6 +3693,294 @@
 
 <file path=ppt/slides/slide2.xml><?xml version="1.0" encoding="utf-8"?>
 <p:sld xmlns:a="http://schemas.openxmlformats.org/drawingml/2006/main" xmlns:r="http://schemas.openxmlformats.org/officeDocument/2006/relationships" xmlns:p="http://schemas.openxmlformats.org/presentationml/2006/main">
+  <p:cSld>
+    <p:spTree>
+      <p:nvGrpSpPr>
+        <p:cNvPr id="1" name=""/>
+        <p:cNvGrpSpPr/>
+        <p:nvPr/>
+      </p:nvGrpSpPr>
+      <p:grpSpPr>
+        <a:xfrm>
+          <a:off x="0" y="0"/>
+          <a:ext cx="0" cy="0"/>
+          <a:chOff x="0" y="0"/>
+          <a:chExt cx="0" cy="0"/>
+        </a:xfrm>
+      </p:grpSpPr>
+      <p:sp>
+        <p:nvSpPr>
+          <p:cNvPr id="2" name="Title 1">
+            <a:extLst>
+              <a:ext uri="{FF2B5EF4-FFF2-40B4-BE49-F238E27FC236}">
+                <a16:creationId xmlns:a16="http://schemas.microsoft.com/office/drawing/2014/main" id="{2F3B64BB-9C86-6E11-1D36-2C1F72B75916}"/>
+              </a:ext>
+            </a:extLst>
+          </p:cNvPr>
+          <p:cNvSpPr>
+            <a:spLocks noGrp="1"/>
+          </p:cNvSpPr>
+          <p:nvPr>
+            <p:ph type="title"/>
+          </p:nvPr>
+        </p:nvSpPr>
+        <p:spPr/>
+        <p:txBody>
+          <a:bodyPr/>
+          <a:lstStyle/>
+          <a:p>
+            <a:r>
+              <a:rPr lang="en-US" dirty="0"/>
+              <a:t>Question</a:t>
+            </a:r>
+          </a:p>
+        </p:txBody>
+      </p:sp>
+      <p:sp>
+        <p:nvSpPr>
+          <p:cNvPr id="3" name="Content Placeholder 2">
+            <a:extLst>
+              <a:ext uri="{FF2B5EF4-FFF2-40B4-BE49-F238E27FC236}">
+                <a16:creationId xmlns:a16="http://schemas.microsoft.com/office/drawing/2014/main" id="{C52450FD-F6DE-817E-3AC0-AC5B57B10B66}"/>
+              </a:ext>
+            </a:extLst>
+          </p:cNvPr>
+          <p:cNvSpPr>
+            <a:spLocks noGrp="1"/>
+          </p:cNvSpPr>
+          <p:nvPr>
+            <p:ph idx="1"/>
+          </p:nvPr>
+        </p:nvSpPr>
+        <p:spPr/>
+        <p:txBody>
+          <a:bodyPr/>
+          <a:lstStyle/>
+          <a:p>
+            <a:r>
+              <a:rPr lang="en-US" dirty="0"/>
+              <a:t>We all know: "Go to college, get a better job, make more money"</a:t>
+            </a:r>
+          </a:p>
+          <a:p>
+            <a:r>
+              <a:rPr lang="en-US" dirty="0"/>
+              <a:t>Let us look at all 254 Texas counties</a:t>
+            </a:r>
+          </a:p>
+          <a:p>
+            <a:r>
+              <a:rPr lang="en-US" dirty="0"/>
+              <a:t>See if education is a driver of wealth</a:t>
+            </a:r>
+          </a:p>
+          <a:p>
+            <a:r>
+              <a:rPr lang="en-US" dirty="0"/>
+              <a:t>And if geography could also be a predictor ...</a:t>
+            </a:r>
+          </a:p>
+        </p:txBody>
+      </p:sp>
+      <p:sp>
+        <p:nvSpPr>
+          <p:cNvPr id="4" name="Slide Number Placeholder 3">
+            <a:extLst>
+              <a:ext uri="{FF2B5EF4-FFF2-40B4-BE49-F238E27FC236}">
+                <a16:creationId xmlns:a16="http://schemas.microsoft.com/office/drawing/2014/main" id="{CA3D75D8-9A55-B844-6A75-717F08B603D2}"/>
+              </a:ext>
+            </a:extLst>
+          </p:cNvPr>
+          <p:cNvSpPr>
+            <a:spLocks noGrp="1"/>
+          </p:cNvSpPr>
+          <p:nvPr>
+            <p:ph type="sldNum" sz="quarter" idx="12"/>
+          </p:nvPr>
+        </p:nvSpPr>
+        <p:spPr/>
+        <p:txBody>
+          <a:bodyPr/>
+          <a:lstStyle/>
+          <a:p>
+            <a:fld id="{C0343C75-1924-D247-85A3-0CB62E67E5D1}" type="slidenum">
+              <a:rPr lang="en-US" smtClean="0"/>
+              <a:t>2</a:t>
+            </a:fld>
+            <a:endParaRPr lang="en-US"/>
+          </a:p>
+        </p:txBody>
+      </p:sp>
+    </p:spTree>
+    <p:extLst>
+      <p:ext uri="{BB962C8B-B14F-4D97-AF65-F5344CB8AC3E}">
+        <p14:creationId xmlns:p14="http://schemas.microsoft.com/office/powerpoint/2010/main" val="1867998294"/>
+      </p:ext>
+    </p:extLst>
+  </p:cSld>
+  <p:clrMapOvr>
+    <a:masterClrMapping/>
+  </p:clrMapOvr>
+</p:sld>
+</file>
+
+<file path=ppt/slides/slide20.xml><?xml version="1.0" encoding="utf-8"?>
+<p:sld xmlns:a="http://schemas.openxmlformats.org/drawingml/2006/main" xmlns:r="http://schemas.openxmlformats.org/officeDocument/2006/relationships" xmlns:p="http://schemas.openxmlformats.org/presentationml/2006/main">
+  <p:cSld>
+    <p:bg>
+      <p:bgPr>
+        <a:solidFill>
+          <a:schemeClr val="bg2"/>
+        </a:solidFill>
+        <a:effectLst/>
+      </p:bgPr>
+    </p:bg>
+    <p:spTree>
+      <p:nvGrpSpPr>
+        <p:cNvPr id="1" name="">
+          <a:extLst>
+            <a:ext uri="{FF2B5EF4-FFF2-40B4-BE49-F238E27FC236}">
+              <a16:creationId xmlns:a16="http://schemas.microsoft.com/office/drawing/2014/main" id="{0E22EE24-17A6-D835-8D88-39C23ACE69CE}"/>
+            </a:ext>
+          </a:extLst>
+        </p:cNvPr>
+        <p:cNvGrpSpPr/>
+        <p:nvPr/>
+      </p:nvGrpSpPr>
+      <p:grpSpPr>
+        <a:xfrm>
+          <a:off x="0" y="0"/>
+          <a:ext cx="0" cy="0"/>
+          <a:chOff x="0" y="0"/>
+          <a:chExt cx="0" cy="0"/>
+        </a:xfrm>
+      </p:grpSpPr>
+      <p:sp>
+        <p:nvSpPr>
+          <p:cNvPr id="2" name="Title 1">
+            <a:extLst>
+              <a:ext uri="{FF2B5EF4-FFF2-40B4-BE49-F238E27FC236}">
+                <a16:creationId xmlns:a16="http://schemas.microsoft.com/office/drawing/2014/main" id="{40023F31-A396-31F7-3C1A-2C360DAD6C36}"/>
+              </a:ext>
+            </a:extLst>
+          </p:cNvPr>
+          <p:cNvSpPr>
+            <a:spLocks noGrp="1"/>
+          </p:cNvSpPr>
+          <p:nvPr>
+            <p:ph type="title"/>
+          </p:nvPr>
+        </p:nvSpPr>
+        <p:spPr/>
+        <p:txBody>
+          <a:bodyPr/>
+          <a:lstStyle/>
+          <a:p>
+            <a:r>
+              <a:rPr lang="en-US" b="1" dirty="0"/>
+              <a:t>References</a:t>
+            </a:r>
+          </a:p>
+        </p:txBody>
+      </p:sp>
+      <p:sp>
+        <p:nvSpPr>
+          <p:cNvPr id="3" name="Content Placeholder 2">
+            <a:extLst>
+              <a:ext uri="{FF2B5EF4-FFF2-40B4-BE49-F238E27FC236}">
+                <a16:creationId xmlns:a16="http://schemas.microsoft.com/office/drawing/2014/main" id="{B6097C0C-B4DA-E2BB-2EC3-F463B2177237}"/>
+              </a:ext>
+            </a:extLst>
+          </p:cNvPr>
+          <p:cNvSpPr>
+            <a:spLocks noGrp="1"/>
+          </p:cNvSpPr>
+          <p:nvPr>
+            <p:ph idx="1"/>
+          </p:nvPr>
+        </p:nvSpPr>
+        <p:spPr/>
+        <p:txBody>
+          <a:bodyPr/>
+          <a:lstStyle/>
+          <a:p>
+            <a:r>
+              <a:rPr lang="en-US" dirty="0"/>
+              <a:t>Spatial Data Science</a:t>
+            </a:r>
+            <a:br>
+              <a:rPr lang="en-US" dirty="0"/>
+            </a:br>
+            <a:r>
+              <a:rPr lang="en-US" sz="1800" dirty="0">
+                <a:hlinkClick r:id="rId2"/>
+              </a:rPr>
+              <a:t>https://r-spatial.org/book/</a:t>
+            </a:r>
+            <a:endParaRPr lang="en-US" dirty="0"/>
+          </a:p>
+          <a:p>
+            <a:r>
+              <a:rPr lang="en-US" dirty="0"/>
+              <a:t>Exploratory Spatial Data Analysis</a:t>
+            </a:r>
+            <a:br>
+              <a:rPr lang="en-US" dirty="0"/>
+            </a:br>
+            <a:r>
+              <a:rPr lang="en-US" sz="1800" dirty="0">
+                <a:hlinkClick r:id="rId3"/>
+              </a:rPr>
+              <a:t>https://cran.r-project.org/web/packages/geostan/vignettes/measuring-sa.html</a:t>
+            </a:r>
+            <a:endParaRPr lang="en-US" sz="1800" dirty="0"/>
+          </a:p>
+        </p:txBody>
+      </p:sp>
+      <p:sp>
+        <p:nvSpPr>
+          <p:cNvPr id="4" name="Slide Number Placeholder 3">
+            <a:extLst>
+              <a:ext uri="{FF2B5EF4-FFF2-40B4-BE49-F238E27FC236}">
+                <a16:creationId xmlns:a16="http://schemas.microsoft.com/office/drawing/2014/main" id="{E3331F52-54AA-5B97-C3EF-C34D311B07AE}"/>
+              </a:ext>
+            </a:extLst>
+          </p:cNvPr>
+          <p:cNvSpPr>
+            <a:spLocks noGrp="1"/>
+          </p:cNvSpPr>
+          <p:nvPr>
+            <p:ph type="sldNum" sz="quarter" idx="12"/>
+          </p:nvPr>
+        </p:nvSpPr>
+        <p:spPr/>
+        <p:txBody>
+          <a:bodyPr/>
+          <a:lstStyle/>
+          <a:p>
+            <a:fld id="{C0343C75-1924-D247-85A3-0CB62E67E5D1}" type="slidenum">
+              <a:rPr lang="en-US" smtClean="0"/>
+              <a:t>20</a:t>
+            </a:fld>
+            <a:endParaRPr lang="en-US"/>
+          </a:p>
+        </p:txBody>
+      </p:sp>
+    </p:spTree>
+    <p:extLst>
+      <p:ext uri="{BB962C8B-B14F-4D97-AF65-F5344CB8AC3E}">
+        <p14:creationId xmlns:p14="http://schemas.microsoft.com/office/powerpoint/2010/main" val="2691076490"/>
+      </p:ext>
+    </p:extLst>
+  </p:cSld>
+  <p:clrMapOvr>
+    <a:masterClrMapping/>
+  </p:clrMapOvr>
+</p:sld>
+</file>
+
+<file path=ppt/slides/slide21.xml><?xml version="1.0" encoding="utf-8"?>
+<p:sld xmlns:a="http://schemas.openxmlformats.org/drawingml/2006/main" xmlns:r="http://schemas.openxmlformats.org/officeDocument/2006/relationships" xmlns:p="http://schemas.openxmlformats.org/presentationml/2006/main" show="0">
   <p:cSld>
     <p:bg>
       <p:bgPr>
@@ -3944,7 +4310,7 @@
           <a:p>
             <a:fld id="{C0343C75-1924-D247-85A3-0CB62E67E5D1}" type="slidenum">
               <a:rPr lang="en-US" smtClean="0"/>
-              <a:t>2</a:t>
+              <a:t>21</a:t>
             </a:fld>
             <a:endParaRPr lang="en-US"/>
           </a:p>
@@ -3994,8 +4360,8 @@
 </p:sld>
 </file>
 
-<file path=ppt/slides/slide3.xml><?xml version="1.0" encoding="utf-8"?>
-<p:sld xmlns:a="http://schemas.openxmlformats.org/drawingml/2006/main" xmlns:r="http://schemas.openxmlformats.org/officeDocument/2006/relationships" xmlns:p="http://schemas.openxmlformats.org/presentationml/2006/main">
+<file path=ppt/slides/slide22.xml><?xml version="1.0" encoding="utf-8"?>
+<p:sld xmlns:a="http://schemas.openxmlformats.org/drawingml/2006/main" xmlns:r="http://schemas.openxmlformats.org/officeDocument/2006/relationships" xmlns:p="http://schemas.openxmlformats.org/presentationml/2006/main" show="0">
   <p:cSld>
     <p:spTree>
       <p:nvGrpSpPr>
@@ -4419,7 +4785,7 @@
           <a:p>
             <a:fld id="{C0343C75-1924-D247-85A3-0CB62E67E5D1}" type="slidenum">
               <a:rPr lang="en-US" smtClean="0"/>
-              <a:t>3</a:t>
+              <a:t>22</a:t>
             </a:fld>
             <a:endParaRPr lang="en-US"/>
           </a:p>
@@ -4921,8 +5287,8 @@
 </p:sld>
 </file>
 
-<file path=ppt/slides/slide4.xml><?xml version="1.0" encoding="utf-8"?>
-<p:sld xmlns:a="http://schemas.openxmlformats.org/drawingml/2006/main" xmlns:r="http://schemas.openxmlformats.org/officeDocument/2006/relationships" xmlns:p="http://schemas.openxmlformats.org/presentationml/2006/main">
+<file path=ppt/slides/slide23.xml><?xml version="1.0" encoding="utf-8"?>
+<p:sld xmlns:a="http://schemas.openxmlformats.org/drawingml/2006/main" xmlns:r="http://schemas.openxmlformats.org/officeDocument/2006/relationships" xmlns:p="http://schemas.openxmlformats.org/presentationml/2006/main" show="0">
   <p:cSld>
     <p:spTree>
       <p:nvGrpSpPr>
@@ -5179,7 +5545,7 @@
           <a:p>
             <a:fld id="{C0343C75-1924-D247-85A3-0CB62E67E5D1}" type="slidenum">
               <a:rPr lang="en-US" smtClean="0"/>
-              <a:t>4</a:t>
+              <a:t>23</a:t>
             </a:fld>
             <a:endParaRPr lang="en-US"/>
           </a:p>
@@ -5288,8 +5654,8 @@
 </p:sld>
 </file>
 
-<file path=ppt/slides/slide5.xml><?xml version="1.0" encoding="utf-8"?>
-<p:sld xmlns:a="http://schemas.openxmlformats.org/drawingml/2006/main" xmlns:r="http://schemas.openxmlformats.org/officeDocument/2006/relationships" xmlns:p="http://schemas.openxmlformats.org/presentationml/2006/main">
+<file path=ppt/slides/slide24.xml><?xml version="1.0" encoding="utf-8"?>
+<p:sld xmlns:a="http://schemas.openxmlformats.org/drawingml/2006/main" xmlns:r="http://schemas.openxmlformats.org/officeDocument/2006/relationships" xmlns:p="http://schemas.openxmlformats.org/presentationml/2006/main" show="0">
   <p:cSld>
     <p:spTree>
       <p:nvGrpSpPr>
@@ -5427,7 +5793,7 @@
           <a:p>
             <a:fld id="{C0343C75-1924-D247-85A3-0CB62E67E5D1}" type="slidenum">
               <a:rPr lang="en-US" smtClean="0"/>
-              <a:t>5</a:t>
+              <a:t>24</a:t>
             </a:fld>
             <a:endParaRPr lang="en-US"/>
           </a:p>
@@ -5588,8 +5954,8 @@
 </p:sld>
 </file>
 
-<file path=ppt/slides/slide6.xml><?xml version="1.0" encoding="utf-8"?>
-<p:sld xmlns:a="http://schemas.openxmlformats.org/drawingml/2006/main" xmlns:r="http://schemas.openxmlformats.org/officeDocument/2006/relationships" xmlns:p="http://schemas.openxmlformats.org/presentationml/2006/main">
+<file path=ppt/slides/slide25.xml><?xml version="1.0" encoding="utf-8"?>
+<p:sld xmlns:a="http://schemas.openxmlformats.org/drawingml/2006/main" xmlns:r="http://schemas.openxmlformats.org/officeDocument/2006/relationships" xmlns:p="http://schemas.openxmlformats.org/presentationml/2006/main" show="0">
   <p:cSld>
     <p:spTree>
       <p:nvGrpSpPr>
@@ -5906,7 +6272,7 @@
           <a:p>
             <a:fld id="{C0343C75-1924-D247-85A3-0CB62E67E5D1}" type="slidenum">
               <a:rPr lang="en-US" smtClean="0"/>
-              <a:t>6</a:t>
+              <a:t>25</a:t>
             </a:fld>
             <a:endParaRPr lang="en-US"/>
           </a:p>
@@ -5925,8 +6291,8 @@
 </p:sld>
 </file>
 
-<file path=ppt/slides/slide7.xml><?xml version="1.0" encoding="utf-8"?>
-<p:sld xmlns:a="http://schemas.openxmlformats.org/drawingml/2006/main" xmlns:r="http://schemas.openxmlformats.org/officeDocument/2006/relationships" xmlns:p="http://schemas.openxmlformats.org/presentationml/2006/main">
+<file path=ppt/slides/slide26.xml><?xml version="1.0" encoding="utf-8"?>
+<p:sld xmlns:a="http://schemas.openxmlformats.org/drawingml/2006/main" xmlns:r="http://schemas.openxmlformats.org/officeDocument/2006/relationships" xmlns:p="http://schemas.openxmlformats.org/presentationml/2006/main" show="0">
   <p:cSld>
     <p:spTree>
       <p:nvGrpSpPr>
@@ -6009,7 +6375,7 @@
           <a:p>
             <a:fld id="{C0343C75-1924-D247-85A3-0CB62E67E5D1}" type="slidenum">
               <a:rPr lang="en-US" smtClean="0"/>
-              <a:t>7</a:t>
+              <a:t>26</a:t>
             </a:fld>
             <a:endParaRPr lang="en-US"/>
           </a:p>
@@ -7019,8 +7385,8 @@
 </p:sld>
 </file>
 
-<file path=ppt/slides/slide8.xml><?xml version="1.0" encoding="utf-8"?>
-<p:sld xmlns:a="http://schemas.openxmlformats.org/drawingml/2006/main" xmlns:r="http://schemas.openxmlformats.org/officeDocument/2006/relationships" xmlns:p="http://schemas.openxmlformats.org/presentationml/2006/main">
+<file path=ppt/slides/slide27.xml><?xml version="1.0" encoding="utf-8"?>
+<p:sld xmlns:a="http://schemas.openxmlformats.org/drawingml/2006/main" xmlns:r="http://schemas.openxmlformats.org/officeDocument/2006/relationships" xmlns:p="http://schemas.openxmlformats.org/presentationml/2006/main" show="0">
   <p:cSld>
     <p:spTree>
       <p:nvGrpSpPr>
@@ -7065,7 +7431,7 @@
           <a:p>
             <a:fld id="{C0343C75-1924-D247-85A3-0CB62E67E5D1}" type="slidenum">
               <a:rPr lang="en-US" smtClean="0"/>
-              <a:t>8</a:t>
+              <a:t>27</a:t>
             </a:fld>
             <a:endParaRPr lang="en-US"/>
           </a:p>
@@ -8047,8 +8413,8 @@
 </p:sld>
 </file>
 
-<file path=ppt/slides/slide9.xml><?xml version="1.0" encoding="utf-8"?>
-<p:sld xmlns:a="http://schemas.openxmlformats.org/drawingml/2006/main" xmlns:r="http://schemas.openxmlformats.org/officeDocument/2006/relationships" xmlns:p="http://schemas.openxmlformats.org/presentationml/2006/main">
+<file path=ppt/slides/slide28.xml><?xml version="1.0" encoding="utf-8"?>
+<p:sld xmlns:a="http://schemas.openxmlformats.org/drawingml/2006/main" xmlns:r="http://schemas.openxmlformats.org/officeDocument/2006/relationships" xmlns:p="http://schemas.openxmlformats.org/presentationml/2006/main" show="0">
   <p:cSld>
     <p:spTree>
       <p:nvGrpSpPr>
@@ -8275,7 +8641,7 @@
           <a:p>
             <a:fld id="{C0343C75-1924-D247-85A3-0CB62E67E5D1}" type="slidenum">
               <a:rPr lang="en-US" smtClean="0"/>
-              <a:t>9</a:t>
+              <a:t>28</a:t>
             </a:fld>
             <a:endParaRPr lang="en-US" dirty="0"/>
           </a:p>
@@ -9276,6 +9642,1968 @@
     <p:extLst>
       <p:ext uri="{BB962C8B-B14F-4D97-AF65-F5344CB8AC3E}">
         <p14:creationId xmlns:p14="http://schemas.microsoft.com/office/powerpoint/2010/main" val="3249708250"/>
+      </p:ext>
+    </p:extLst>
+  </p:cSld>
+  <p:clrMapOvr>
+    <a:masterClrMapping/>
+  </p:clrMapOvr>
+</p:sld>
+</file>
+
+<file path=ppt/slides/slide29.xml><?xml version="1.0" encoding="utf-8"?>
+<p:sld xmlns:a="http://schemas.openxmlformats.org/drawingml/2006/main" xmlns:r="http://schemas.openxmlformats.org/officeDocument/2006/relationships" xmlns:p="http://schemas.openxmlformats.org/presentationml/2006/main" show="0">
+  <p:cSld>
+    <p:spTree>
+      <p:nvGrpSpPr>
+        <p:cNvPr id="1" name="">
+          <a:extLst>
+            <a:ext uri="{FF2B5EF4-FFF2-40B4-BE49-F238E27FC236}">
+              <a16:creationId xmlns:a16="http://schemas.microsoft.com/office/drawing/2014/main" id="{A43DDC0E-5DA0-EE3A-EDF8-D128EB0C43CB}"/>
+            </a:ext>
+          </a:extLst>
+        </p:cNvPr>
+        <p:cNvGrpSpPr/>
+        <p:nvPr/>
+      </p:nvGrpSpPr>
+      <p:grpSpPr>
+        <a:xfrm>
+          <a:off x="0" y="0"/>
+          <a:ext cx="0" cy="0"/>
+          <a:chOff x="0" y="0"/>
+          <a:chExt cx="0" cy="0"/>
+        </a:xfrm>
+      </p:grpSpPr>
+      <p:sp>
+        <p:nvSpPr>
+          <p:cNvPr id="7" name="Content Placeholder 2">
+            <a:extLst>
+              <a:ext uri="{FF2B5EF4-FFF2-40B4-BE49-F238E27FC236}">
+                <a16:creationId xmlns:a16="http://schemas.microsoft.com/office/drawing/2014/main" id="{E64F6C3B-E080-8481-B871-FBA1CF1A564A}"/>
+              </a:ext>
+            </a:extLst>
+          </p:cNvPr>
+          <p:cNvSpPr txBox="1">
+            <a:spLocks/>
+          </p:cNvSpPr>
+          <p:nvPr/>
+        </p:nvSpPr>
+        <p:spPr>
+          <a:xfrm>
+            <a:off x="4572000" y="1592494"/>
+            <a:ext cx="4114801" cy="4763858"/>
+          </a:xfrm>
+          <a:prstGeom prst="rect">
+            <a:avLst/>
+          </a:prstGeom>
+        </p:spPr>
+        <p:txBody>
+          <a:bodyPr vert="horz" lIns="91440" tIns="45720" rIns="91440" bIns="45720" rtlCol="0">
+            <a:noAutofit/>
+          </a:bodyPr>
+          <a:lstStyle>
+            <a:lvl1pPr marL="228600" indent="-228600" algn="l" defTabSz="914400" rtl="0" eaLnBrk="1" latinLnBrk="0" hangingPunct="1">
+              <a:lnSpc>
+                <a:spcPct val="90000"/>
+              </a:lnSpc>
+              <a:spcBef>
+                <a:spcPts val="1000"/>
+              </a:spcBef>
+              <a:buFont typeface="Arial" panose="020B0604020202020204" pitchFamily="34" charset="0"/>
+              <a:buChar char="•"/>
+              <a:defRPr sz="2000" kern="1200">
+                <a:solidFill>
+                  <a:schemeClr val="tx1"/>
+                </a:solidFill>
+                <a:latin typeface="+mn-lt"/>
+                <a:ea typeface="+mn-ea"/>
+                <a:cs typeface="+mn-cs"/>
+              </a:defRPr>
+            </a:lvl1pPr>
+            <a:lvl2pPr marL="685800" indent="-228600" algn="l" defTabSz="914400" rtl="0" eaLnBrk="1" latinLnBrk="0" hangingPunct="1">
+              <a:lnSpc>
+                <a:spcPct val="90000"/>
+              </a:lnSpc>
+              <a:spcBef>
+                <a:spcPts val="500"/>
+              </a:spcBef>
+              <a:buFont typeface="Arial" panose="020B0604020202020204" pitchFamily="34" charset="0"/>
+              <a:buChar char="•"/>
+              <a:defRPr sz="2000" kern="1200">
+                <a:solidFill>
+                  <a:schemeClr val="tx1"/>
+                </a:solidFill>
+                <a:latin typeface="+mn-lt"/>
+                <a:ea typeface="+mn-ea"/>
+                <a:cs typeface="+mn-cs"/>
+              </a:defRPr>
+            </a:lvl2pPr>
+            <a:lvl3pPr marL="1143000" indent="-228600" algn="l" defTabSz="914400" rtl="0" eaLnBrk="1" latinLnBrk="0" hangingPunct="1">
+              <a:lnSpc>
+                <a:spcPct val="90000"/>
+              </a:lnSpc>
+              <a:spcBef>
+                <a:spcPts val="500"/>
+              </a:spcBef>
+              <a:buFont typeface="Arial" panose="020B0604020202020204" pitchFamily="34" charset="0"/>
+              <a:buChar char="•"/>
+              <a:defRPr sz="2000" kern="1200">
+                <a:solidFill>
+                  <a:schemeClr val="tx1"/>
+                </a:solidFill>
+                <a:latin typeface="+mn-lt"/>
+                <a:ea typeface="+mn-ea"/>
+                <a:cs typeface="+mn-cs"/>
+              </a:defRPr>
+            </a:lvl3pPr>
+            <a:lvl4pPr marL="1600200" indent="-228600" algn="l" defTabSz="914400" rtl="0" eaLnBrk="1" latinLnBrk="0" hangingPunct="1">
+              <a:lnSpc>
+                <a:spcPct val="90000"/>
+              </a:lnSpc>
+              <a:spcBef>
+                <a:spcPts val="500"/>
+              </a:spcBef>
+              <a:buFont typeface="Arial" panose="020B0604020202020204" pitchFamily="34" charset="0"/>
+              <a:buChar char="•"/>
+              <a:defRPr sz="1800" kern="1200">
+                <a:solidFill>
+                  <a:schemeClr val="tx1"/>
+                </a:solidFill>
+                <a:latin typeface="+mn-lt"/>
+                <a:ea typeface="+mn-ea"/>
+                <a:cs typeface="+mn-cs"/>
+              </a:defRPr>
+            </a:lvl4pPr>
+            <a:lvl5pPr marL="2057400" indent="-228600" algn="l" defTabSz="914400" rtl="0" eaLnBrk="1" latinLnBrk="0" hangingPunct="1">
+              <a:lnSpc>
+                <a:spcPct val="90000"/>
+              </a:lnSpc>
+              <a:spcBef>
+                <a:spcPts val="500"/>
+              </a:spcBef>
+              <a:buFont typeface="Arial" panose="020B0604020202020204" pitchFamily="34" charset="0"/>
+              <a:buChar char="•"/>
+              <a:defRPr sz="1800" kern="1200">
+                <a:solidFill>
+                  <a:schemeClr val="tx1"/>
+                </a:solidFill>
+                <a:latin typeface="+mn-lt"/>
+                <a:ea typeface="+mn-ea"/>
+                <a:cs typeface="+mn-cs"/>
+              </a:defRPr>
+            </a:lvl5pPr>
+            <a:lvl6pPr marL="2514600" indent="-228600" algn="l" defTabSz="914400" rtl="0" eaLnBrk="1" latinLnBrk="0" hangingPunct="1">
+              <a:lnSpc>
+                <a:spcPct val="90000"/>
+              </a:lnSpc>
+              <a:spcBef>
+                <a:spcPts val="500"/>
+              </a:spcBef>
+              <a:buFont typeface="Arial" panose="020B0604020202020204" pitchFamily="34" charset="0"/>
+              <a:buChar char="•"/>
+              <a:defRPr sz="1800" kern="1200">
+                <a:solidFill>
+                  <a:schemeClr val="tx1"/>
+                </a:solidFill>
+                <a:latin typeface="+mn-lt"/>
+                <a:ea typeface="+mn-ea"/>
+                <a:cs typeface="+mn-cs"/>
+              </a:defRPr>
+            </a:lvl6pPr>
+            <a:lvl7pPr marL="2971800" indent="-228600" algn="l" defTabSz="914400" rtl="0" eaLnBrk="1" latinLnBrk="0" hangingPunct="1">
+              <a:lnSpc>
+                <a:spcPct val="90000"/>
+              </a:lnSpc>
+              <a:spcBef>
+                <a:spcPts val="500"/>
+              </a:spcBef>
+              <a:buFont typeface="Arial" panose="020B0604020202020204" pitchFamily="34" charset="0"/>
+              <a:buChar char="•"/>
+              <a:defRPr sz="1800" kern="1200">
+                <a:solidFill>
+                  <a:schemeClr val="tx1"/>
+                </a:solidFill>
+                <a:latin typeface="+mn-lt"/>
+                <a:ea typeface="+mn-ea"/>
+                <a:cs typeface="+mn-cs"/>
+              </a:defRPr>
+            </a:lvl7pPr>
+            <a:lvl8pPr marL="3429000" indent="-228600" algn="l" defTabSz="914400" rtl="0" eaLnBrk="1" latinLnBrk="0" hangingPunct="1">
+              <a:lnSpc>
+                <a:spcPct val="90000"/>
+              </a:lnSpc>
+              <a:spcBef>
+                <a:spcPts val="500"/>
+              </a:spcBef>
+              <a:buFont typeface="Arial" panose="020B0604020202020204" pitchFamily="34" charset="0"/>
+              <a:buChar char="•"/>
+              <a:defRPr sz="1800" kern="1200">
+                <a:solidFill>
+                  <a:schemeClr val="tx1"/>
+                </a:solidFill>
+                <a:latin typeface="+mn-lt"/>
+                <a:ea typeface="+mn-ea"/>
+                <a:cs typeface="+mn-cs"/>
+              </a:defRPr>
+            </a:lvl8pPr>
+            <a:lvl9pPr marL="3886200" indent="-228600" algn="l" defTabSz="914400" rtl="0" eaLnBrk="1" latinLnBrk="0" hangingPunct="1">
+              <a:lnSpc>
+                <a:spcPct val="90000"/>
+              </a:lnSpc>
+              <a:spcBef>
+                <a:spcPts val="500"/>
+              </a:spcBef>
+              <a:buFont typeface="Arial" panose="020B0604020202020204" pitchFamily="34" charset="0"/>
+              <a:buChar char="•"/>
+              <a:defRPr sz="1800" kern="1200">
+                <a:solidFill>
+                  <a:schemeClr val="tx1"/>
+                </a:solidFill>
+                <a:latin typeface="+mn-lt"/>
+                <a:ea typeface="+mn-ea"/>
+                <a:cs typeface="+mn-cs"/>
+              </a:defRPr>
+            </a:lvl9pPr>
+          </a:lstStyle>
+          <a:p>
+            <a:endParaRPr lang="en-US" sz="1400" dirty="0"/>
+          </a:p>
+        </p:txBody>
+      </p:sp>
+      <p:sp>
+        <p:nvSpPr>
+          <p:cNvPr id="2" name="Title 1">
+            <a:extLst>
+              <a:ext uri="{FF2B5EF4-FFF2-40B4-BE49-F238E27FC236}">
+                <a16:creationId xmlns:a16="http://schemas.microsoft.com/office/drawing/2014/main" id="{764CE543-5136-9DAC-AD2A-BD1F66260BDB}"/>
+              </a:ext>
+            </a:extLst>
+          </p:cNvPr>
+          <p:cNvSpPr>
+            <a:spLocks noGrp="1"/>
+          </p:cNvSpPr>
+          <p:nvPr>
+            <p:ph type="title"/>
+          </p:nvPr>
+        </p:nvSpPr>
+        <p:spPr/>
+        <p:txBody>
+          <a:bodyPr anchor="ctr"/>
+          <a:lstStyle/>
+          <a:p>
+            <a:endParaRPr lang="en-US" b="1" dirty="0"/>
+          </a:p>
+        </p:txBody>
+      </p:sp>
+      <p:sp>
+        <p:nvSpPr>
+          <p:cNvPr id="3" name="Content Placeholder 2">
+            <a:extLst>
+              <a:ext uri="{FF2B5EF4-FFF2-40B4-BE49-F238E27FC236}">
+                <a16:creationId xmlns:a16="http://schemas.microsoft.com/office/drawing/2014/main" id="{94446766-CBCB-2B6F-08AE-D5CC516889E5}"/>
+              </a:ext>
+            </a:extLst>
+          </p:cNvPr>
+          <p:cNvSpPr>
+            <a:spLocks noGrp="1"/>
+          </p:cNvSpPr>
+          <p:nvPr>
+            <p:ph idx="1"/>
+          </p:nvPr>
+        </p:nvSpPr>
+        <p:spPr>
+          <a:xfrm>
+            <a:off x="457199" y="1140432"/>
+            <a:ext cx="4114801" cy="5215920"/>
+          </a:xfrm>
+        </p:spPr>
+        <p:txBody>
+          <a:bodyPr>
+            <a:noAutofit/>
+          </a:bodyPr>
+          <a:lstStyle/>
+          <a:p>
+            <a:endParaRPr lang="en-US" sz="1400" dirty="0"/>
+          </a:p>
+        </p:txBody>
+      </p:sp>
+      <p:sp>
+        <p:nvSpPr>
+          <p:cNvPr id="4" name="Slide Number Placeholder 3">
+            <a:extLst>
+              <a:ext uri="{FF2B5EF4-FFF2-40B4-BE49-F238E27FC236}">
+                <a16:creationId xmlns:a16="http://schemas.microsoft.com/office/drawing/2014/main" id="{638B7185-82F2-4A5E-5B22-7EC65200C79A}"/>
+              </a:ext>
+            </a:extLst>
+          </p:cNvPr>
+          <p:cNvSpPr>
+            <a:spLocks noGrp="1"/>
+          </p:cNvSpPr>
+          <p:nvPr>
+            <p:ph type="sldNum" sz="quarter" idx="12"/>
+          </p:nvPr>
+        </p:nvSpPr>
+        <p:spPr/>
+        <p:txBody>
+          <a:bodyPr/>
+          <a:lstStyle/>
+          <a:p>
+            <a:fld id="{C0343C75-1924-D247-85A3-0CB62E67E5D1}" type="slidenum">
+              <a:rPr lang="en-US" smtClean="0"/>
+              <a:t>29</a:t>
+            </a:fld>
+            <a:endParaRPr lang="en-US"/>
+          </a:p>
+        </p:txBody>
+      </p:sp>
+      <p:sp>
+        <p:nvSpPr>
+          <p:cNvPr id="6" name="Content Placeholder 2">
+            <a:extLst>
+              <a:ext uri="{FF2B5EF4-FFF2-40B4-BE49-F238E27FC236}">
+                <a16:creationId xmlns:a16="http://schemas.microsoft.com/office/drawing/2014/main" id="{6DDD6E87-C414-6EF1-6F29-4CF989BA00F7}"/>
+              </a:ext>
+            </a:extLst>
+          </p:cNvPr>
+          <p:cNvSpPr txBox="1">
+            <a:spLocks/>
+          </p:cNvSpPr>
+          <p:nvPr/>
+        </p:nvSpPr>
+        <p:spPr>
+          <a:xfrm>
+            <a:off x="4849402" y="2969231"/>
+            <a:ext cx="3837398" cy="3567036"/>
+          </a:xfrm>
+          <a:prstGeom prst="rect">
+            <a:avLst/>
+          </a:prstGeom>
+        </p:spPr>
+        <p:txBody>
+          <a:bodyPr vert="horz" lIns="91440" tIns="45720" rIns="91440" bIns="45720" rtlCol="0">
+            <a:noAutofit/>
+          </a:bodyPr>
+          <a:lstStyle>
+            <a:lvl1pPr marL="228600" indent="-228600" algn="l" defTabSz="914400" rtl="0" eaLnBrk="1" latinLnBrk="0" hangingPunct="1">
+              <a:lnSpc>
+                <a:spcPct val="90000"/>
+              </a:lnSpc>
+              <a:spcBef>
+                <a:spcPts val="1000"/>
+              </a:spcBef>
+              <a:buFont typeface="Arial" panose="020B0604020202020204" pitchFamily="34" charset="0"/>
+              <a:buChar char="•"/>
+              <a:defRPr sz="2000" kern="1200">
+                <a:solidFill>
+                  <a:schemeClr val="tx1"/>
+                </a:solidFill>
+                <a:latin typeface="+mn-lt"/>
+                <a:ea typeface="+mn-ea"/>
+                <a:cs typeface="+mn-cs"/>
+              </a:defRPr>
+            </a:lvl1pPr>
+            <a:lvl2pPr marL="685800" indent="-228600" algn="l" defTabSz="914400" rtl="0" eaLnBrk="1" latinLnBrk="0" hangingPunct="1">
+              <a:lnSpc>
+                <a:spcPct val="90000"/>
+              </a:lnSpc>
+              <a:spcBef>
+                <a:spcPts val="500"/>
+              </a:spcBef>
+              <a:buFont typeface="Arial" panose="020B0604020202020204" pitchFamily="34" charset="0"/>
+              <a:buChar char="•"/>
+              <a:defRPr sz="2000" kern="1200">
+                <a:solidFill>
+                  <a:schemeClr val="tx1"/>
+                </a:solidFill>
+                <a:latin typeface="+mn-lt"/>
+                <a:ea typeface="+mn-ea"/>
+                <a:cs typeface="+mn-cs"/>
+              </a:defRPr>
+            </a:lvl2pPr>
+            <a:lvl3pPr marL="1143000" indent="-228600" algn="l" defTabSz="914400" rtl="0" eaLnBrk="1" latinLnBrk="0" hangingPunct="1">
+              <a:lnSpc>
+                <a:spcPct val="90000"/>
+              </a:lnSpc>
+              <a:spcBef>
+                <a:spcPts val="500"/>
+              </a:spcBef>
+              <a:buFont typeface="Arial" panose="020B0604020202020204" pitchFamily="34" charset="0"/>
+              <a:buChar char="•"/>
+              <a:defRPr sz="2000" kern="1200">
+                <a:solidFill>
+                  <a:schemeClr val="tx1"/>
+                </a:solidFill>
+                <a:latin typeface="+mn-lt"/>
+                <a:ea typeface="+mn-ea"/>
+                <a:cs typeface="+mn-cs"/>
+              </a:defRPr>
+            </a:lvl3pPr>
+            <a:lvl4pPr marL="1600200" indent="-228600" algn="l" defTabSz="914400" rtl="0" eaLnBrk="1" latinLnBrk="0" hangingPunct="1">
+              <a:lnSpc>
+                <a:spcPct val="90000"/>
+              </a:lnSpc>
+              <a:spcBef>
+                <a:spcPts val="500"/>
+              </a:spcBef>
+              <a:buFont typeface="Arial" panose="020B0604020202020204" pitchFamily="34" charset="0"/>
+              <a:buChar char="•"/>
+              <a:defRPr sz="1800" kern="1200">
+                <a:solidFill>
+                  <a:schemeClr val="tx1"/>
+                </a:solidFill>
+                <a:latin typeface="+mn-lt"/>
+                <a:ea typeface="+mn-ea"/>
+                <a:cs typeface="+mn-cs"/>
+              </a:defRPr>
+            </a:lvl4pPr>
+            <a:lvl5pPr marL="2057400" indent="-228600" algn="l" defTabSz="914400" rtl="0" eaLnBrk="1" latinLnBrk="0" hangingPunct="1">
+              <a:lnSpc>
+                <a:spcPct val="90000"/>
+              </a:lnSpc>
+              <a:spcBef>
+                <a:spcPts val="500"/>
+              </a:spcBef>
+              <a:buFont typeface="Arial" panose="020B0604020202020204" pitchFamily="34" charset="0"/>
+              <a:buChar char="•"/>
+              <a:defRPr sz="1800" kern="1200">
+                <a:solidFill>
+                  <a:schemeClr val="tx1"/>
+                </a:solidFill>
+                <a:latin typeface="+mn-lt"/>
+                <a:ea typeface="+mn-ea"/>
+                <a:cs typeface="+mn-cs"/>
+              </a:defRPr>
+            </a:lvl5pPr>
+            <a:lvl6pPr marL="2514600" indent="-228600" algn="l" defTabSz="914400" rtl="0" eaLnBrk="1" latinLnBrk="0" hangingPunct="1">
+              <a:lnSpc>
+                <a:spcPct val="90000"/>
+              </a:lnSpc>
+              <a:spcBef>
+                <a:spcPts val="500"/>
+              </a:spcBef>
+              <a:buFont typeface="Arial" panose="020B0604020202020204" pitchFamily="34" charset="0"/>
+              <a:buChar char="•"/>
+              <a:defRPr sz="1800" kern="1200">
+                <a:solidFill>
+                  <a:schemeClr val="tx1"/>
+                </a:solidFill>
+                <a:latin typeface="+mn-lt"/>
+                <a:ea typeface="+mn-ea"/>
+                <a:cs typeface="+mn-cs"/>
+              </a:defRPr>
+            </a:lvl6pPr>
+            <a:lvl7pPr marL="2971800" indent="-228600" algn="l" defTabSz="914400" rtl="0" eaLnBrk="1" latinLnBrk="0" hangingPunct="1">
+              <a:lnSpc>
+                <a:spcPct val="90000"/>
+              </a:lnSpc>
+              <a:spcBef>
+                <a:spcPts val="500"/>
+              </a:spcBef>
+              <a:buFont typeface="Arial" panose="020B0604020202020204" pitchFamily="34" charset="0"/>
+              <a:buChar char="•"/>
+              <a:defRPr sz="1800" kern="1200">
+                <a:solidFill>
+                  <a:schemeClr val="tx1"/>
+                </a:solidFill>
+                <a:latin typeface="+mn-lt"/>
+                <a:ea typeface="+mn-ea"/>
+                <a:cs typeface="+mn-cs"/>
+              </a:defRPr>
+            </a:lvl7pPr>
+            <a:lvl8pPr marL="3429000" indent="-228600" algn="l" defTabSz="914400" rtl="0" eaLnBrk="1" latinLnBrk="0" hangingPunct="1">
+              <a:lnSpc>
+                <a:spcPct val="90000"/>
+              </a:lnSpc>
+              <a:spcBef>
+                <a:spcPts val="500"/>
+              </a:spcBef>
+              <a:buFont typeface="Arial" panose="020B0604020202020204" pitchFamily="34" charset="0"/>
+              <a:buChar char="•"/>
+              <a:defRPr sz="1800" kern="1200">
+                <a:solidFill>
+                  <a:schemeClr val="tx1"/>
+                </a:solidFill>
+                <a:latin typeface="+mn-lt"/>
+                <a:ea typeface="+mn-ea"/>
+                <a:cs typeface="+mn-cs"/>
+              </a:defRPr>
+            </a:lvl8pPr>
+            <a:lvl9pPr marL="3886200" indent="-228600" algn="l" defTabSz="914400" rtl="0" eaLnBrk="1" latinLnBrk="0" hangingPunct="1">
+              <a:lnSpc>
+                <a:spcPct val="90000"/>
+              </a:lnSpc>
+              <a:spcBef>
+                <a:spcPts val="500"/>
+              </a:spcBef>
+              <a:buFont typeface="Arial" panose="020B0604020202020204" pitchFamily="34" charset="0"/>
+              <a:buChar char="•"/>
+              <a:defRPr sz="1800" kern="1200">
+                <a:solidFill>
+                  <a:schemeClr val="tx1"/>
+                </a:solidFill>
+                <a:latin typeface="+mn-lt"/>
+                <a:ea typeface="+mn-ea"/>
+                <a:cs typeface="+mn-cs"/>
+              </a:defRPr>
+            </a:lvl9pPr>
+          </a:lstStyle>
+          <a:p>
+            <a:pPr marL="0" indent="0">
+              <a:lnSpc>
+                <a:spcPct val="100000"/>
+              </a:lnSpc>
+              <a:spcBef>
+                <a:spcPts val="400"/>
+              </a:spcBef>
+              <a:buNone/>
+            </a:pPr>
+            <a:endParaRPr lang="en-US" sz="1200" b="1" dirty="0">
+              <a:solidFill>
+                <a:schemeClr val="tx1">
+                  <a:lumMod val="65000"/>
+                  <a:lumOff val="35000"/>
+                </a:schemeClr>
+              </a:solidFill>
+              <a:latin typeface="Consolas" panose="020B0609020204030204" pitchFamily="49" charset="0"/>
+              <a:cs typeface="Consolas" panose="020B0609020204030204" pitchFamily="49" charset="0"/>
+            </a:endParaRPr>
+          </a:p>
+        </p:txBody>
+      </p:sp>
+      <p:sp>
+        <p:nvSpPr>
+          <p:cNvPr id="10" name="TextBox 9">
+            <a:extLst>
+              <a:ext uri="{FF2B5EF4-FFF2-40B4-BE49-F238E27FC236}">
+                <a16:creationId xmlns:a16="http://schemas.microsoft.com/office/drawing/2014/main" id="{5A3B335F-4906-89D3-2B3E-A7CA0CE24A42}"/>
+              </a:ext>
+            </a:extLst>
+          </p:cNvPr>
+          <p:cNvSpPr txBox="1"/>
+          <p:nvPr/>
+        </p:nvSpPr>
+        <p:spPr>
+          <a:xfrm>
+            <a:off x="6537034" y="2640014"/>
+            <a:ext cx="184730" cy="235962"/>
+          </a:xfrm>
+          <a:prstGeom prst="rect">
+            <a:avLst/>
+          </a:prstGeom>
+          <a:solidFill>
+            <a:srgbClr val="C00000"/>
+          </a:solidFill>
+        </p:spPr>
+        <p:txBody>
+          <a:bodyPr wrap="none" rtlCol="0" anchor="ctr">
+            <a:spAutoFit/>
+          </a:bodyPr>
+          <a:lstStyle/>
+          <a:p>
+            <a:pPr algn="ctr"/>
+            <a:endParaRPr lang="en-US" sz="1400" baseline="30000" dirty="0">
+              <a:solidFill>
+                <a:schemeClr val="bg1"/>
+              </a:solidFill>
+            </a:endParaRPr>
+          </a:p>
+        </p:txBody>
+      </p:sp>
+      <p:pic>
+        <p:nvPicPr>
+          <p:cNvPr id="12" name="Picture 11">
+            <a:extLst>
+              <a:ext uri="{FF2B5EF4-FFF2-40B4-BE49-F238E27FC236}">
+                <a16:creationId xmlns:a16="http://schemas.microsoft.com/office/drawing/2014/main" id="{34B9EA82-EEB5-96AF-068D-36F9ECFD8F78}"/>
+              </a:ext>
+            </a:extLst>
+          </p:cNvPr>
+          <p:cNvPicPr>
+            <a:picLocks noChangeAspect="1"/>
+          </p:cNvPicPr>
+          <p:nvPr/>
+        </p:nvPicPr>
+        <p:blipFill>
+          <a:blip r:embed="rId2"/>
+          <a:stretch>
+            <a:fillRect/>
+          </a:stretch>
+        </p:blipFill>
+        <p:spPr>
+          <a:xfrm>
+            <a:off x="685800" y="4071084"/>
+            <a:ext cx="7772400" cy="2374704"/>
+          </a:xfrm>
+          <a:prstGeom prst="rect">
+            <a:avLst/>
+          </a:prstGeom>
+        </p:spPr>
+      </p:pic>
+    </p:spTree>
+    <p:extLst>
+      <p:ext uri="{BB962C8B-B14F-4D97-AF65-F5344CB8AC3E}">
+        <p14:creationId xmlns:p14="http://schemas.microsoft.com/office/powerpoint/2010/main" val="3387503856"/>
+      </p:ext>
+    </p:extLst>
+  </p:cSld>
+  <p:clrMapOvr>
+    <a:masterClrMapping/>
+  </p:clrMapOvr>
+</p:sld>
+</file>
+
+<file path=ppt/slides/slide3.xml><?xml version="1.0" encoding="utf-8"?>
+<p:sld xmlns:a="http://schemas.openxmlformats.org/drawingml/2006/main" xmlns:r="http://schemas.openxmlformats.org/officeDocument/2006/relationships" xmlns:p="http://schemas.openxmlformats.org/presentationml/2006/main">
+  <p:cSld>
+    <p:spTree>
+      <p:nvGrpSpPr>
+        <p:cNvPr id="1" name="">
+          <a:extLst>
+            <a:ext uri="{FF2B5EF4-FFF2-40B4-BE49-F238E27FC236}">
+              <a16:creationId xmlns:a16="http://schemas.microsoft.com/office/drawing/2014/main" id="{A8DE32B2-7A0C-556E-17A2-4B123EFA2550}"/>
+            </a:ext>
+          </a:extLst>
+        </p:cNvPr>
+        <p:cNvGrpSpPr/>
+        <p:nvPr/>
+      </p:nvGrpSpPr>
+      <p:grpSpPr>
+        <a:xfrm>
+          <a:off x="0" y="0"/>
+          <a:ext cx="0" cy="0"/>
+          <a:chOff x="0" y="0"/>
+          <a:chExt cx="0" cy="0"/>
+        </a:xfrm>
+      </p:grpSpPr>
+      <p:sp>
+        <p:nvSpPr>
+          <p:cNvPr id="2" name="Title 1">
+            <a:extLst>
+              <a:ext uri="{FF2B5EF4-FFF2-40B4-BE49-F238E27FC236}">
+                <a16:creationId xmlns:a16="http://schemas.microsoft.com/office/drawing/2014/main" id="{E1AC4618-E829-A3C1-7E3C-82AF0F0045F5}"/>
+              </a:ext>
+            </a:extLst>
+          </p:cNvPr>
+          <p:cNvSpPr>
+            <a:spLocks noGrp="1"/>
+          </p:cNvSpPr>
+          <p:nvPr>
+            <p:ph type="title"/>
+          </p:nvPr>
+        </p:nvSpPr>
+        <p:spPr/>
+        <p:txBody>
+          <a:bodyPr/>
+          <a:lstStyle/>
+          <a:p>
+            <a:r>
+              <a:rPr lang="en-US" dirty="0"/>
+              <a:t>Data</a:t>
+            </a:r>
+          </a:p>
+        </p:txBody>
+      </p:sp>
+      <p:sp>
+        <p:nvSpPr>
+          <p:cNvPr id="3" name="Content Placeholder 2">
+            <a:extLst>
+              <a:ext uri="{FF2B5EF4-FFF2-40B4-BE49-F238E27FC236}">
+                <a16:creationId xmlns:a16="http://schemas.microsoft.com/office/drawing/2014/main" id="{F332EAF4-11FC-448A-1F8B-4C01FB876B3C}"/>
+              </a:ext>
+            </a:extLst>
+          </p:cNvPr>
+          <p:cNvSpPr>
+            <a:spLocks noGrp="1"/>
+          </p:cNvSpPr>
+          <p:nvPr>
+            <p:ph idx="1"/>
+          </p:nvPr>
+        </p:nvSpPr>
+        <p:spPr/>
+        <p:txBody>
+          <a:bodyPr>
+            <a:normAutofit/>
+          </a:bodyPr>
+          <a:lstStyle/>
+          <a:p>
+            <a:r>
+              <a:rPr lang="en-US" dirty="0"/>
+              <a:t>Pulled 2022 ACS 5-year census data.</a:t>
+            </a:r>
+          </a:p>
+          <a:p>
+            <a:pPr lvl="1"/>
+            <a:r>
+              <a:rPr lang="en-US" dirty="0"/>
+              <a:t>Dependent Variable: Median  Income</a:t>
+            </a:r>
+          </a:p>
+          <a:p>
+            <a:endParaRPr lang="en-US" dirty="0"/>
+          </a:p>
+          <a:p>
+            <a:endParaRPr lang="en-US" dirty="0"/>
+          </a:p>
+          <a:p>
+            <a:endParaRPr lang="en-US" dirty="0"/>
+          </a:p>
+          <a:p>
+            <a:endParaRPr lang="en-US" dirty="0"/>
+          </a:p>
+          <a:p>
+            <a:endParaRPr lang="en-US" dirty="0"/>
+          </a:p>
+          <a:p>
+            <a:endParaRPr lang="en-US" dirty="0"/>
+          </a:p>
+          <a:p>
+            <a:pPr lvl="1"/>
+            <a:r>
+              <a:rPr lang="en-US" dirty="0"/>
+              <a:t>Independent Variable:</a:t>
+            </a:r>
+            <a:br>
+              <a:rPr lang="en-US" dirty="0"/>
+            </a:br>
+            <a:r>
+              <a:rPr lang="en-US" dirty="0"/>
+              <a:t>Percentage of adults with a Bachelor's degree or higher</a:t>
+            </a:r>
+          </a:p>
+        </p:txBody>
+      </p:sp>
+      <p:sp>
+        <p:nvSpPr>
+          <p:cNvPr id="4" name="Slide Number Placeholder 3">
+            <a:extLst>
+              <a:ext uri="{FF2B5EF4-FFF2-40B4-BE49-F238E27FC236}">
+                <a16:creationId xmlns:a16="http://schemas.microsoft.com/office/drawing/2014/main" id="{AC4153FE-C5BE-7F1C-FA3A-E40BD1DEAC2A}"/>
+              </a:ext>
+            </a:extLst>
+          </p:cNvPr>
+          <p:cNvSpPr>
+            <a:spLocks noGrp="1"/>
+          </p:cNvSpPr>
+          <p:nvPr>
+            <p:ph type="sldNum" sz="quarter" idx="12"/>
+          </p:nvPr>
+        </p:nvSpPr>
+        <p:spPr/>
+        <p:txBody>
+          <a:bodyPr/>
+          <a:lstStyle/>
+          <a:p>
+            <a:fld id="{C0343C75-1924-D247-85A3-0CB62E67E5D1}" type="slidenum">
+              <a:rPr lang="en-US" smtClean="0"/>
+              <a:t>3</a:t>
+            </a:fld>
+            <a:endParaRPr lang="en-US"/>
+          </a:p>
+        </p:txBody>
+      </p:sp>
+      <p:pic>
+        <p:nvPicPr>
+          <p:cNvPr id="8" name="Picture 7">
+            <a:extLst>
+              <a:ext uri="{FF2B5EF4-FFF2-40B4-BE49-F238E27FC236}">
+                <a16:creationId xmlns:a16="http://schemas.microsoft.com/office/drawing/2014/main" id="{1160C316-59C0-3806-709D-CBDE6C9446C3}"/>
+              </a:ext>
+            </a:extLst>
+          </p:cNvPr>
+          <p:cNvPicPr>
+            <a:picLocks noChangeAspect="1"/>
+          </p:cNvPicPr>
+          <p:nvPr/>
+        </p:nvPicPr>
+        <p:blipFill>
+          <a:blip r:embed="rId2"/>
+          <a:stretch>
+            <a:fillRect/>
+          </a:stretch>
+        </p:blipFill>
+        <p:spPr>
+          <a:xfrm>
+            <a:off x="1701193" y="2467128"/>
+            <a:ext cx="5741613" cy="1759357"/>
+          </a:xfrm>
+          <a:prstGeom prst="rect">
+            <a:avLst/>
+          </a:prstGeom>
+        </p:spPr>
+      </p:pic>
+    </p:spTree>
+    <p:extLst>
+      <p:ext uri="{BB962C8B-B14F-4D97-AF65-F5344CB8AC3E}">
+        <p14:creationId xmlns:p14="http://schemas.microsoft.com/office/powerpoint/2010/main" val="1111121819"/>
+      </p:ext>
+    </p:extLst>
+  </p:cSld>
+  <p:clrMapOvr>
+    <a:masterClrMapping/>
+  </p:clrMapOvr>
+</p:sld>
+</file>
+
+<file path=ppt/slides/slide30.xml><?xml version="1.0" encoding="utf-8"?>
+<p:sld xmlns:a="http://schemas.openxmlformats.org/drawingml/2006/main" xmlns:r="http://schemas.openxmlformats.org/officeDocument/2006/relationships" xmlns:p="http://schemas.openxmlformats.org/presentationml/2006/main" show="0">
+  <p:cSld>
+    <p:spTree>
+      <p:nvGrpSpPr>
+        <p:cNvPr id="1" name="">
+          <a:extLst>
+            <a:ext uri="{FF2B5EF4-FFF2-40B4-BE49-F238E27FC236}">
+              <a16:creationId xmlns:a16="http://schemas.microsoft.com/office/drawing/2014/main" id="{2B74F36F-56ED-D413-3936-1775C02DE92F}"/>
+            </a:ext>
+          </a:extLst>
+        </p:cNvPr>
+        <p:cNvGrpSpPr/>
+        <p:nvPr/>
+      </p:nvGrpSpPr>
+      <p:grpSpPr>
+        <a:xfrm>
+          <a:off x="0" y="0"/>
+          <a:ext cx="0" cy="0"/>
+          <a:chOff x="0" y="0"/>
+          <a:chExt cx="0" cy="0"/>
+        </a:xfrm>
+      </p:grpSpPr>
+      <p:sp>
+        <p:nvSpPr>
+          <p:cNvPr id="3" name="Content Placeholder 2">
+            <a:extLst>
+              <a:ext uri="{FF2B5EF4-FFF2-40B4-BE49-F238E27FC236}">
+                <a16:creationId xmlns:a16="http://schemas.microsoft.com/office/drawing/2014/main" id="{1537507E-BEE7-1C3E-D954-248C666E769C}"/>
+              </a:ext>
+            </a:extLst>
+          </p:cNvPr>
+          <p:cNvSpPr>
+            <a:spLocks noGrp="1"/>
+          </p:cNvSpPr>
+          <p:nvPr>
+            <p:ph idx="1"/>
+          </p:nvPr>
+        </p:nvSpPr>
+        <p:spPr>
+          <a:xfrm>
+            <a:off x="457200" y="321734"/>
+            <a:ext cx="8229600" cy="6034618"/>
+          </a:xfrm>
+        </p:spPr>
+        <p:txBody>
+          <a:bodyPr>
+            <a:noAutofit/>
+          </a:bodyPr>
+          <a:lstStyle/>
+          <a:p>
+            <a:pPr marL="0" indent="0">
+              <a:buNone/>
+            </a:pPr>
+            <a:r>
+              <a:rPr lang="en-US" sz="2400" b="1" dirty="0"/>
+              <a:t>AA</a:t>
+            </a:r>
+          </a:p>
+          <a:p>
+            <a:r>
+              <a:rPr lang="en-US" sz="1600" dirty="0"/>
+              <a:t>AA</a:t>
+            </a:r>
+          </a:p>
+          <a:p>
+            <a:pPr lvl="2"/>
+            <a:endParaRPr lang="en-US" sz="1800" dirty="0"/>
+          </a:p>
+        </p:txBody>
+      </p:sp>
+      <p:sp>
+        <p:nvSpPr>
+          <p:cNvPr id="4" name="Slide Number Placeholder 3">
+            <a:extLst>
+              <a:ext uri="{FF2B5EF4-FFF2-40B4-BE49-F238E27FC236}">
+                <a16:creationId xmlns:a16="http://schemas.microsoft.com/office/drawing/2014/main" id="{DBF402D8-9403-798E-B33F-D6D5B3DE09C9}"/>
+              </a:ext>
+            </a:extLst>
+          </p:cNvPr>
+          <p:cNvSpPr>
+            <a:spLocks noGrp="1"/>
+          </p:cNvSpPr>
+          <p:nvPr>
+            <p:ph type="sldNum" sz="quarter" idx="12"/>
+          </p:nvPr>
+        </p:nvSpPr>
+        <p:spPr/>
+        <p:txBody>
+          <a:bodyPr/>
+          <a:lstStyle/>
+          <a:p>
+            <a:fld id="{C0343C75-1924-D247-85A3-0CB62E67E5D1}" type="slidenum">
+              <a:rPr lang="en-US" smtClean="0"/>
+              <a:t>30</a:t>
+            </a:fld>
+            <a:endParaRPr lang="en-US"/>
+          </a:p>
+        </p:txBody>
+      </p:sp>
+      <p:pic>
+        <p:nvPicPr>
+          <p:cNvPr id="7" name="Picture 6">
+            <a:extLst>
+              <a:ext uri="{FF2B5EF4-FFF2-40B4-BE49-F238E27FC236}">
+                <a16:creationId xmlns:a16="http://schemas.microsoft.com/office/drawing/2014/main" id="{BEC47934-BEF8-097B-51C8-AFE9841C5E51}"/>
+              </a:ext>
+            </a:extLst>
+          </p:cNvPr>
+          <p:cNvPicPr>
+            <a:picLocks noChangeAspect="1"/>
+          </p:cNvPicPr>
+          <p:nvPr/>
+        </p:nvPicPr>
+        <p:blipFill>
+          <a:blip r:embed="rId2"/>
+          <a:stretch>
+            <a:fillRect/>
+          </a:stretch>
+        </p:blipFill>
+        <p:spPr>
+          <a:xfrm>
+            <a:off x="685800" y="4071084"/>
+            <a:ext cx="7772400" cy="2374704"/>
+          </a:xfrm>
+          <a:prstGeom prst="rect">
+            <a:avLst/>
+          </a:prstGeom>
+        </p:spPr>
+      </p:pic>
+      <p:sp>
+        <p:nvSpPr>
+          <p:cNvPr id="10" name="Oval 9">
+            <a:extLst>
+              <a:ext uri="{FF2B5EF4-FFF2-40B4-BE49-F238E27FC236}">
+                <a16:creationId xmlns:a16="http://schemas.microsoft.com/office/drawing/2014/main" id="{2BC61E6C-FF64-6BBB-BC76-2294CE26E8EF}"/>
+              </a:ext>
+            </a:extLst>
+          </p:cNvPr>
+          <p:cNvSpPr>
+            <a:spLocks/>
+          </p:cNvSpPr>
+          <p:nvPr/>
+        </p:nvSpPr>
+        <p:spPr>
+          <a:xfrm>
+            <a:off x="3063240" y="3744024"/>
+            <a:ext cx="3017520" cy="2926080"/>
+          </a:xfrm>
+          <a:prstGeom prst="ellipse">
+            <a:avLst/>
+          </a:prstGeom>
+          <a:solidFill>
+            <a:srgbClr val="FFC000">
+              <a:alpha val="5098"/>
+            </a:srgbClr>
+          </a:solidFill>
+          <a:ln w="38100">
+            <a:solidFill>
+              <a:srgbClr val="C00000">
+                <a:alpha val="50196"/>
+              </a:srgbClr>
+            </a:solidFill>
+          </a:ln>
+        </p:spPr>
+        <p:style>
+          <a:lnRef idx="2">
+            <a:schemeClr val="accent1">
+              <a:shade val="15000"/>
+            </a:schemeClr>
+          </a:lnRef>
+          <a:fillRef idx="1">
+            <a:schemeClr val="accent1"/>
+          </a:fillRef>
+          <a:effectRef idx="0">
+            <a:schemeClr val="accent1"/>
+          </a:effectRef>
+          <a:fontRef idx="minor">
+            <a:schemeClr val="lt1"/>
+          </a:fontRef>
+        </p:style>
+        <p:txBody>
+          <a:bodyPr rtlCol="0" anchor="ctr"/>
+          <a:lstStyle/>
+          <a:p>
+            <a:pPr algn="ctr"/>
+            <a:endParaRPr lang="en-US"/>
+          </a:p>
+        </p:txBody>
+      </p:sp>
+    </p:spTree>
+    <p:extLst>
+      <p:ext uri="{BB962C8B-B14F-4D97-AF65-F5344CB8AC3E}">
+        <p14:creationId xmlns:p14="http://schemas.microsoft.com/office/powerpoint/2010/main" val="963920275"/>
+      </p:ext>
+    </p:extLst>
+  </p:cSld>
+  <p:clrMapOvr>
+    <a:masterClrMapping/>
+  </p:clrMapOvr>
+</p:sld>
+</file>
+
+<file path=ppt/slides/slide31.xml><?xml version="1.0" encoding="utf-8"?>
+<p:sld xmlns:a="http://schemas.openxmlformats.org/drawingml/2006/main" xmlns:r="http://schemas.openxmlformats.org/officeDocument/2006/relationships" xmlns:p="http://schemas.openxmlformats.org/presentationml/2006/main" show="0">
+  <p:cSld>
+    <p:spTree>
+      <p:nvGrpSpPr>
+        <p:cNvPr id="1" name=""/>
+        <p:cNvGrpSpPr/>
+        <p:nvPr/>
+      </p:nvGrpSpPr>
+      <p:grpSpPr>
+        <a:xfrm>
+          <a:off x="0" y="0"/>
+          <a:ext cx="0" cy="0"/>
+          <a:chOff x="0" y="0"/>
+          <a:chExt cx="0" cy="0"/>
+        </a:xfrm>
+      </p:grpSpPr>
+      <p:sp>
+        <p:nvSpPr>
+          <p:cNvPr id="2" name="Title 1">
+            <a:extLst>
+              <a:ext uri="{FF2B5EF4-FFF2-40B4-BE49-F238E27FC236}">
+                <a16:creationId xmlns:a16="http://schemas.microsoft.com/office/drawing/2014/main" id="{4A3296F8-68EF-F4FD-6CC3-F33124427258}"/>
+              </a:ext>
+            </a:extLst>
+          </p:cNvPr>
+          <p:cNvSpPr>
+            <a:spLocks noGrp="1"/>
+          </p:cNvSpPr>
+          <p:nvPr>
+            <p:ph type="title"/>
+          </p:nvPr>
+        </p:nvSpPr>
+        <p:spPr/>
+        <p:txBody>
+          <a:bodyPr/>
+          <a:lstStyle/>
+          <a:p>
+            <a:endParaRPr lang="en-US"/>
+          </a:p>
+        </p:txBody>
+      </p:sp>
+      <p:sp>
+        <p:nvSpPr>
+          <p:cNvPr id="3" name="Content Placeholder 2">
+            <a:extLst>
+              <a:ext uri="{FF2B5EF4-FFF2-40B4-BE49-F238E27FC236}">
+                <a16:creationId xmlns:a16="http://schemas.microsoft.com/office/drawing/2014/main" id="{3640CB8C-79B2-760D-6086-BA1D10475508}"/>
+              </a:ext>
+            </a:extLst>
+          </p:cNvPr>
+          <p:cNvSpPr>
+            <a:spLocks noGrp="1"/>
+          </p:cNvSpPr>
+          <p:nvPr>
+            <p:ph idx="1"/>
+          </p:nvPr>
+        </p:nvSpPr>
+        <p:spPr/>
+        <p:txBody>
+          <a:bodyPr/>
+          <a:lstStyle/>
+          <a:p>
+            <a:r>
+              <a:rPr lang="en-US" dirty="0"/>
+              <a:t>We often treat success as an individual achievement.</a:t>
+            </a:r>
+          </a:p>
+          <a:p>
+            <a:r>
+              <a:rPr lang="en-US" dirty="0"/>
+              <a:t>In data terms, we treat a county's wealth as a product of its own merits.</a:t>
+            </a:r>
+          </a:p>
+          <a:p>
+            <a:pPr lvl="1"/>
+            <a:r>
+              <a:rPr lang="en-US" dirty="0"/>
+              <a:t>Specifically, its education level.</a:t>
+            </a:r>
+          </a:p>
+          <a:p>
+            <a:r>
+              <a:rPr lang="en-US" dirty="0"/>
+              <a:t>But counties aren't islands; they are part of a massive, interconnected web.</a:t>
+            </a:r>
+          </a:p>
+          <a:p>
+            <a:pPr lvl="1"/>
+            <a:r>
+              <a:rPr lang="en-US" dirty="0"/>
+              <a:t>Is a county wealthy because its people are educated, or because it is lucky enough to be next to a "Powerhouse" county?</a:t>
+            </a:r>
+          </a:p>
+        </p:txBody>
+      </p:sp>
+      <p:sp>
+        <p:nvSpPr>
+          <p:cNvPr id="4" name="Slide Number Placeholder 3">
+            <a:extLst>
+              <a:ext uri="{FF2B5EF4-FFF2-40B4-BE49-F238E27FC236}">
+                <a16:creationId xmlns:a16="http://schemas.microsoft.com/office/drawing/2014/main" id="{ABF2DD3D-5F45-C6EE-2782-81B7D36AF881}"/>
+              </a:ext>
+            </a:extLst>
+          </p:cNvPr>
+          <p:cNvSpPr>
+            <a:spLocks noGrp="1"/>
+          </p:cNvSpPr>
+          <p:nvPr>
+            <p:ph type="sldNum" sz="quarter" idx="12"/>
+          </p:nvPr>
+        </p:nvSpPr>
+        <p:spPr/>
+        <p:txBody>
+          <a:bodyPr/>
+          <a:lstStyle/>
+          <a:p>
+            <a:fld id="{C0343C75-1924-D247-85A3-0CB62E67E5D1}" type="slidenum">
+              <a:rPr lang="en-US" smtClean="0"/>
+              <a:t>31</a:t>
+            </a:fld>
+            <a:endParaRPr lang="en-US"/>
+          </a:p>
+        </p:txBody>
+      </p:sp>
+    </p:spTree>
+    <p:extLst>
+      <p:ext uri="{BB962C8B-B14F-4D97-AF65-F5344CB8AC3E}">
+        <p14:creationId xmlns:p14="http://schemas.microsoft.com/office/powerpoint/2010/main" val="2004806596"/>
+      </p:ext>
+    </p:extLst>
+  </p:cSld>
+  <p:clrMapOvr>
+    <a:masterClrMapping/>
+  </p:clrMapOvr>
+</p:sld>
+</file>
+
+<file path=ppt/slides/slide4.xml><?xml version="1.0" encoding="utf-8"?>
+<p:sld xmlns:a="http://schemas.openxmlformats.org/drawingml/2006/main" xmlns:r="http://schemas.openxmlformats.org/officeDocument/2006/relationships" xmlns:p="http://schemas.openxmlformats.org/presentationml/2006/main">
+  <p:cSld>
+    <p:spTree>
+      <p:nvGrpSpPr>
+        <p:cNvPr id="1" name="">
+          <a:extLst>
+            <a:ext uri="{FF2B5EF4-FFF2-40B4-BE49-F238E27FC236}">
+              <a16:creationId xmlns:a16="http://schemas.microsoft.com/office/drawing/2014/main" id="{3CF7A691-D7BB-2FDB-7DEE-AC0A8A1821A3}"/>
+            </a:ext>
+          </a:extLst>
+        </p:cNvPr>
+        <p:cNvGrpSpPr/>
+        <p:nvPr/>
+      </p:nvGrpSpPr>
+      <p:grpSpPr>
+        <a:xfrm>
+          <a:off x="0" y="0"/>
+          <a:ext cx="0" cy="0"/>
+          <a:chOff x="0" y="0"/>
+          <a:chExt cx="0" cy="0"/>
+        </a:xfrm>
+      </p:grpSpPr>
+      <p:sp>
+        <p:nvSpPr>
+          <p:cNvPr id="2" name="Title 1">
+            <a:extLst>
+              <a:ext uri="{FF2B5EF4-FFF2-40B4-BE49-F238E27FC236}">
+                <a16:creationId xmlns:a16="http://schemas.microsoft.com/office/drawing/2014/main" id="{3064D7E8-7D0A-6743-6D9C-1F25DA5A5A2C}"/>
+              </a:ext>
+            </a:extLst>
+          </p:cNvPr>
+          <p:cNvSpPr>
+            <a:spLocks noGrp="1"/>
+          </p:cNvSpPr>
+          <p:nvPr>
+            <p:ph type="title"/>
+          </p:nvPr>
+        </p:nvSpPr>
+        <p:spPr/>
+        <p:txBody>
+          <a:bodyPr/>
+          <a:lstStyle/>
+          <a:p>
+            <a:r>
+              <a:rPr lang="en-US" dirty="0"/>
+              <a:t>Baseline (OLS)</a:t>
+            </a:r>
+          </a:p>
+        </p:txBody>
+      </p:sp>
+      <p:sp>
+        <p:nvSpPr>
+          <p:cNvPr id="3" name="Content Placeholder 2">
+            <a:extLst>
+              <a:ext uri="{FF2B5EF4-FFF2-40B4-BE49-F238E27FC236}">
+                <a16:creationId xmlns:a16="http://schemas.microsoft.com/office/drawing/2014/main" id="{79DB4ED2-4C81-A5A5-1EE5-DF42815F26A3}"/>
+              </a:ext>
+            </a:extLst>
+          </p:cNvPr>
+          <p:cNvSpPr>
+            <a:spLocks noGrp="1"/>
+          </p:cNvSpPr>
+          <p:nvPr>
+            <p:ph idx="1"/>
+          </p:nvPr>
+        </p:nvSpPr>
+        <p:spPr/>
+        <p:txBody>
+          <a:bodyPr>
+            <a:normAutofit fontScale="92500" lnSpcReduction="10000"/>
+          </a:bodyPr>
+          <a:lstStyle/>
+          <a:p>
+            <a:r>
+              <a:rPr lang="en-US" dirty="0"/>
+              <a:t>Look at a basic scatterplot, the story is clear:</a:t>
+            </a:r>
+            <a:br>
+              <a:rPr lang="en-US" dirty="0"/>
+            </a:br>
+            <a:r>
+              <a:rPr lang="en-US" dirty="0"/>
+              <a:t>				as education goes up, income follows.</a:t>
+            </a:r>
+          </a:p>
+          <a:p>
+            <a:endParaRPr lang="en-US" dirty="0"/>
+          </a:p>
+          <a:p>
+            <a:endParaRPr lang="en-US" dirty="0"/>
+          </a:p>
+          <a:p>
+            <a:endParaRPr lang="en-US" dirty="0"/>
+          </a:p>
+          <a:p>
+            <a:endParaRPr lang="en-US" dirty="0"/>
+          </a:p>
+          <a:p>
+            <a:endParaRPr lang="en-US" dirty="0"/>
+          </a:p>
+          <a:p>
+            <a:endParaRPr lang="en-US" dirty="0"/>
+          </a:p>
+          <a:p>
+            <a:endParaRPr lang="en-US" dirty="0"/>
+          </a:p>
+          <a:p>
+            <a:pPr marL="0" indent="0">
+              <a:buNone/>
+            </a:pPr>
+            <a:endParaRPr lang="en-US" dirty="0"/>
+          </a:p>
+          <a:p>
+            <a:r>
+              <a:rPr lang="en-US" dirty="0"/>
+              <a:t>Baseline model shows a strong, positive correlation</a:t>
+            </a:r>
+          </a:p>
+          <a:p>
+            <a:pPr lvl="1"/>
+            <a:r>
+              <a:rPr lang="en-US" sz="1600" dirty="0"/>
+              <a:t>This model assumes every county is independent.</a:t>
+            </a:r>
+          </a:p>
+          <a:p>
+            <a:pPr lvl="1"/>
+            <a:r>
+              <a:rPr lang="en-US" sz="1600" dirty="0"/>
+              <a:t>It assumes that what happens in Travis County has zero effect on Williamson County.</a:t>
+            </a:r>
+          </a:p>
+          <a:p>
+            <a:pPr lvl="1"/>
+            <a:r>
+              <a:rPr lang="en-US" sz="1600" dirty="0"/>
+              <a:t>We know that's not how the real-world works.</a:t>
+            </a:r>
+          </a:p>
+        </p:txBody>
+      </p:sp>
+      <p:sp>
+        <p:nvSpPr>
+          <p:cNvPr id="4" name="Slide Number Placeholder 3">
+            <a:extLst>
+              <a:ext uri="{FF2B5EF4-FFF2-40B4-BE49-F238E27FC236}">
+                <a16:creationId xmlns:a16="http://schemas.microsoft.com/office/drawing/2014/main" id="{2A5E0534-9210-D83B-FB7C-0B5657A06BC3}"/>
+              </a:ext>
+            </a:extLst>
+          </p:cNvPr>
+          <p:cNvSpPr>
+            <a:spLocks noGrp="1"/>
+          </p:cNvSpPr>
+          <p:nvPr>
+            <p:ph type="sldNum" sz="quarter" idx="12"/>
+          </p:nvPr>
+        </p:nvSpPr>
+        <p:spPr/>
+        <p:txBody>
+          <a:bodyPr/>
+          <a:lstStyle/>
+          <a:p>
+            <a:fld id="{C0343C75-1924-D247-85A3-0CB62E67E5D1}" type="slidenum">
+              <a:rPr lang="en-US" smtClean="0"/>
+              <a:t>4</a:t>
+            </a:fld>
+            <a:endParaRPr lang="en-US"/>
+          </a:p>
+        </p:txBody>
+      </p:sp>
+    </p:spTree>
+    <p:extLst>
+      <p:ext uri="{BB962C8B-B14F-4D97-AF65-F5344CB8AC3E}">
+        <p14:creationId xmlns:p14="http://schemas.microsoft.com/office/powerpoint/2010/main" val="4068520318"/>
+      </p:ext>
+    </p:extLst>
+  </p:cSld>
+  <p:clrMapOvr>
+    <a:masterClrMapping/>
+  </p:clrMapOvr>
+</p:sld>
+</file>
+
+<file path=ppt/slides/slide5.xml><?xml version="1.0" encoding="utf-8"?>
+<p:sld xmlns:a="http://schemas.openxmlformats.org/drawingml/2006/main" xmlns:r="http://schemas.openxmlformats.org/officeDocument/2006/relationships" xmlns:p="http://schemas.openxmlformats.org/presentationml/2006/main">
+  <p:cSld>
+    <p:spTree>
+      <p:nvGrpSpPr>
+        <p:cNvPr id="1" name=""/>
+        <p:cNvGrpSpPr/>
+        <p:nvPr/>
+      </p:nvGrpSpPr>
+      <p:grpSpPr>
+        <a:xfrm>
+          <a:off x="0" y="0"/>
+          <a:ext cx="0" cy="0"/>
+          <a:chOff x="0" y="0"/>
+          <a:chExt cx="0" cy="0"/>
+        </a:xfrm>
+      </p:grpSpPr>
+      <p:sp>
+        <p:nvSpPr>
+          <p:cNvPr id="4" name="Slide Number Placeholder 3">
+            <a:extLst>
+              <a:ext uri="{FF2B5EF4-FFF2-40B4-BE49-F238E27FC236}">
+                <a16:creationId xmlns:a16="http://schemas.microsoft.com/office/drawing/2014/main" id="{E5148A92-9398-EF96-E9DF-ADFAEFC307BD}"/>
+              </a:ext>
+            </a:extLst>
+          </p:cNvPr>
+          <p:cNvSpPr>
+            <a:spLocks noGrp="1"/>
+          </p:cNvSpPr>
+          <p:nvPr>
+            <p:ph type="sldNum" sz="quarter" idx="12"/>
+          </p:nvPr>
+        </p:nvSpPr>
+        <p:spPr/>
+        <p:txBody>
+          <a:bodyPr/>
+          <a:lstStyle/>
+          <a:p>
+            <a:fld id="{C0343C75-1924-D247-85A3-0CB62E67E5D1}" type="slidenum">
+              <a:rPr lang="en-US" smtClean="0"/>
+              <a:t>5</a:t>
+            </a:fld>
+            <a:endParaRPr lang="en-US"/>
+          </a:p>
+        </p:txBody>
+      </p:sp>
+      <p:pic>
+        <p:nvPicPr>
+          <p:cNvPr id="12" name="Picture 11">
+            <a:extLst>
+              <a:ext uri="{FF2B5EF4-FFF2-40B4-BE49-F238E27FC236}">
+                <a16:creationId xmlns:a16="http://schemas.microsoft.com/office/drawing/2014/main" id="{51F9686A-3E31-4B45-0606-5DD79FC75044}"/>
+              </a:ext>
+            </a:extLst>
+          </p:cNvPr>
+          <p:cNvPicPr>
+            <a:picLocks noChangeAspect="1"/>
+          </p:cNvPicPr>
+          <p:nvPr/>
+        </p:nvPicPr>
+        <p:blipFill>
+          <a:blip r:embed="rId2"/>
+          <a:stretch>
+            <a:fillRect/>
+          </a:stretch>
+        </p:blipFill>
+        <p:spPr>
+          <a:xfrm>
+            <a:off x="356700" y="960120"/>
+            <a:ext cx="8430600" cy="4937760"/>
+          </a:xfrm>
+          <a:prstGeom prst="rect">
+            <a:avLst/>
+          </a:prstGeom>
+        </p:spPr>
+      </p:pic>
+    </p:spTree>
+    <p:extLst>
+      <p:ext uri="{BB962C8B-B14F-4D97-AF65-F5344CB8AC3E}">
+        <p14:creationId xmlns:p14="http://schemas.microsoft.com/office/powerpoint/2010/main" val="576121306"/>
+      </p:ext>
+    </p:extLst>
+  </p:cSld>
+  <p:clrMapOvr>
+    <a:masterClrMapping/>
+  </p:clrMapOvr>
+</p:sld>
+</file>
+
+<file path=ppt/slides/slide6.xml><?xml version="1.0" encoding="utf-8"?>
+<p:sld xmlns:a="http://schemas.openxmlformats.org/drawingml/2006/main" xmlns:r="http://schemas.openxmlformats.org/officeDocument/2006/relationships" xmlns:p="http://schemas.openxmlformats.org/presentationml/2006/main">
+  <p:cSld>
+    <p:spTree>
+      <p:nvGrpSpPr>
+        <p:cNvPr id="1" name="">
+          <a:extLst>
+            <a:ext uri="{FF2B5EF4-FFF2-40B4-BE49-F238E27FC236}">
+              <a16:creationId xmlns:a16="http://schemas.microsoft.com/office/drawing/2014/main" id="{EF1564C9-17FD-1046-9A40-AAFDB05DD205}"/>
+            </a:ext>
+          </a:extLst>
+        </p:cNvPr>
+        <p:cNvGrpSpPr/>
+        <p:nvPr/>
+      </p:nvGrpSpPr>
+      <p:grpSpPr>
+        <a:xfrm>
+          <a:off x="0" y="0"/>
+          <a:ext cx="0" cy="0"/>
+          <a:chOff x="0" y="0"/>
+          <a:chExt cx="0" cy="0"/>
+        </a:xfrm>
+      </p:grpSpPr>
+      <p:pic>
+        <p:nvPicPr>
+          <p:cNvPr id="2" name="Picture 1">
+            <a:extLst>
+              <a:ext uri="{FF2B5EF4-FFF2-40B4-BE49-F238E27FC236}">
+                <a16:creationId xmlns:a16="http://schemas.microsoft.com/office/drawing/2014/main" id="{995947AF-205A-74A9-BE7C-52470499C7D0}"/>
+              </a:ext>
+            </a:extLst>
+          </p:cNvPr>
+          <p:cNvPicPr>
+            <a:picLocks noChangeAspect="1"/>
+          </p:cNvPicPr>
+          <p:nvPr/>
+        </p:nvPicPr>
+        <p:blipFill>
+          <a:blip r:embed="rId2"/>
+          <a:stretch>
+            <a:fillRect/>
+          </a:stretch>
+        </p:blipFill>
+        <p:spPr>
+          <a:xfrm>
+            <a:off x="256200" y="960120"/>
+            <a:ext cx="8430600" cy="4937760"/>
+          </a:xfrm>
+          <a:prstGeom prst="rect">
+            <a:avLst/>
+          </a:prstGeom>
+        </p:spPr>
+      </p:pic>
+      <p:sp>
+        <p:nvSpPr>
+          <p:cNvPr id="4" name="Slide Number Placeholder 3">
+            <a:extLst>
+              <a:ext uri="{FF2B5EF4-FFF2-40B4-BE49-F238E27FC236}">
+                <a16:creationId xmlns:a16="http://schemas.microsoft.com/office/drawing/2014/main" id="{C548E311-E3CB-5F68-708D-4713AD43F74E}"/>
+              </a:ext>
+            </a:extLst>
+          </p:cNvPr>
+          <p:cNvSpPr>
+            <a:spLocks noGrp="1"/>
+          </p:cNvSpPr>
+          <p:nvPr>
+            <p:ph type="sldNum" sz="quarter" idx="12"/>
+          </p:nvPr>
+        </p:nvSpPr>
+        <p:spPr/>
+        <p:txBody>
+          <a:bodyPr/>
+          <a:lstStyle/>
+          <a:p>
+            <a:fld id="{C0343C75-1924-D247-85A3-0CB62E67E5D1}" type="slidenum">
+              <a:rPr lang="en-US" smtClean="0"/>
+              <a:t>6</a:t>
+            </a:fld>
+            <a:endParaRPr lang="en-US"/>
+          </a:p>
+        </p:txBody>
+      </p:sp>
+    </p:spTree>
+    <p:extLst>
+      <p:ext uri="{BB962C8B-B14F-4D97-AF65-F5344CB8AC3E}">
+        <p14:creationId xmlns:p14="http://schemas.microsoft.com/office/powerpoint/2010/main" val="1242579264"/>
+      </p:ext>
+    </p:extLst>
+  </p:cSld>
+  <p:clrMapOvr>
+    <a:masterClrMapping/>
+  </p:clrMapOvr>
+</p:sld>
+</file>
+
+<file path=ppt/slides/slide7.xml><?xml version="1.0" encoding="utf-8"?>
+<p:sld xmlns:a="http://schemas.openxmlformats.org/drawingml/2006/main" xmlns:r="http://schemas.openxmlformats.org/officeDocument/2006/relationships" xmlns:p="http://schemas.openxmlformats.org/presentationml/2006/main">
+  <p:cSld>
+    <p:spTree>
+      <p:nvGrpSpPr>
+        <p:cNvPr id="1" name="">
+          <a:extLst>
+            <a:ext uri="{FF2B5EF4-FFF2-40B4-BE49-F238E27FC236}">
+              <a16:creationId xmlns:a16="http://schemas.microsoft.com/office/drawing/2014/main" id="{43EF6758-C7F7-3704-3F8C-54F93A0FA5F9}"/>
+            </a:ext>
+          </a:extLst>
+        </p:cNvPr>
+        <p:cNvGrpSpPr/>
+        <p:nvPr/>
+      </p:nvGrpSpPr>
+      <p:grpSpPr>
+        <a:xfrm>
+          <a:off x="0" y="0"/>
+          <a:ext cx="0" cy="0"/>
+          <a:chOff x="0" y="0"/>
+          <a:chExt cx="0" cy="0"/>
+        </a:xfrm>
+      </p:grpSpPr>
+      <p:sp>
+        <p:nvSpPr>
+          <p:cNvPr id="4" name="Slide Number Placeholder 3">
+            <a:extLst>
+              <a:ext uri="{FF2B5EF4-FFF2-40B4-BE49-F238E27FC236}">
+                <a16:creationId xmlns:a16="http://schemas.microsoft.com/office/drawing/2014/main" id="{97783B8E-CF9C-4C67-4F6C-05728709D362}"/>
+              </a:ext>
+            </a:extLst>
+          </p:cNvPr>
+          <p:cNvSpPr>
+            <a:spLocks noGrp="1"/>
+          </p:cNvSpPr>
+          <p:nvPr>
+            <p:ph type="sldNum" sz="quarter" idx="12"/>
+          </p:nvPr>
+        </p:nvSpPr>
+        <p:spPr/>
+        <p:txBody>
+          <a:bodyPr/>
+          <a:lstStyle/>
+          <a:p>
+            <a:fld id="{C0343C75-1924-D247-85A3-0CB62E67E5D1}" type="slidenum">
+              <a:rPr lang="en-US" smtClean="0"/>
+              <a:t>7</a:t>
+            </a:fld>
+            <a:endParaRPr lang="en-US"/>
+          </a:p>
+        </p:txBody>
+      </p:sp>
+      <p:pic>
+        <p:nvPicPr>
+          <p:cNvPr id="7" name="Picture 6">
+            <a:extLst>
+              <a:ext uri="{FF2B5EF4-FFF2-40B4-BE49-F238E27FC236}">
+                <a16:creationId xmlns:a16="http://schemas.microsoft.com/office/drawing/2014/main" id="{019FDBC6-CA87-F305-791F-DB71D54DD19B}"/>
+              </a:ext>
+            </a:extLst>
+          </p:cNvPr>
+          <p:cNvPicPr>
+            <a:picLocks noChangeAspect="1"/>
+          </p:cNvPicPr>
+          <p:nvPr/>
+        </p:nvPicPr>
+        <p:blipFill>
+          <a:blip r:embed="rId2"/>
+          <a:stretch>
+            <a:fillRect/>
+          </a:stretch>
+        </p:blipFill>
+        <p:spPr>
+          <a:xfrm>
+            <a:off x="4708487" y="149115"/>
+            <a:ext cx="3841825" cy="3279886"/>
+          </a:xfrm>
+          <a:prstGeom prst="rect">
+            <a:avLst/>
+          </a:prstGeom>
+        </p:spPr>
+      </p:pic>
+      <p:pic>
+        <p:nvPicPr>
+          <p:cNvPr id="9" name="Picture 8">
+            <a:extLst>
+              <a:ext uri="{FF2B5EF4-FFF2-40B4-BE49-F238E27FC236}">
+                <a16:creationId xmlns:a16="http://schemas.microsoft.com/office/drawing/2014/main" id="{54B961A6-8D13-40BD-E030-38F4579A0013}"/>
+              </a:ext>
+            </a:extLst>
+          </p:cNvPr>
+          <p:cNvPicPr>
+            <a:picLocks noChangeAspect="1"/>
+          </p:cNvPicPr>
+          <p:nvPr/>
+        </p:nvPicPr>
+        <p:blipFill>
+          <a:blip r:embed="rId3"/>
+          <a:stretch>
+            <a:fillRect/>
+          </a:stretch>
+        </p:blipFill>
+        <p:spPr>
+          <a:xfrm>
+            <a:off x="593688" y="149115"/>
+            <a:ext cx="3841825" cy="3279885"/>
+          </a:xfrm>
+          <a:prstGeom prst="rect">
+            <a:avLst/>
+          </a:prstGeom>
+        </p:spPr>
+      </p:pic>
+      <p:pic>
+        <p:nvPicPr>
+          <p:cNvPr id="10" name="Picture 9">
+            <a:extLst>
+              <a:ext uri="{FF2B5EF4-FFF2-40B4-BE49-F238E27FC236}">
+                <a16:creationId xmlns:a16="http://schemas.microsoft.com/office/drawing/2014/main" id="{2C99D0BE-F710-502C-E8B1-13F76604EA09}"/>
+              </a:ext>
+            </a:extLst>
+          </p:cNvPr>
+          <p:cNvPicPr>
+            <a:picLocks noChangeAspect="1"/>
+          </p:cNvPicPr>
+          <p:nvPr/>
+        </p:nvPicPr>
+        <p:blipFill>
+          <a:blip r:embed="rId4"/>
+          <a:stretch>
+            <a:fillRect/>
+          </a:stretch>
+        </p:blipFill>
+        <p:spPr>
+          <a:xfrm>
+            <a:off x="4708486" y="3441590"/>
+            <a:ext cx="3841825" cy="3279886"/>
+          </a:xfrm>
+          <a:prstGeom prst="rect">
+            <a:avLst/>
+          </a:prstGeom>
+        </p:spPr>
+      </p:pic>
+    </p:spTree>
+    <p:extLst>
+      <p:ext uri="{BB962C8B-B14F-4D97-AF65-F5344CB8AC3E}">
+        <p14:creationId xmlns:p14="http://schemas.microsoft.com/office/powerpoint/2010/main" val="1370689508"/>
+      </p:ext>
+    </p:extLst>
+  </p:cSld>
+  <p:clrMapOvr>
+    <a:masterClrMapping/>
+  </p:clrMapOvr>
+</p:sld>
+</file>
+
+<file path=ppt/slides/slide8.xml><?xml version="1.0" encoding="utf-8"?>
+<p:sld xmlns:a="http://schemas.openxmlformats.org/drawingml/2006/main" xmlns:r="http://schemas.openxmlformats.org/officeDocument/2006/relationships" xmlns:p="http://schemas.openxmlformats.org/presentationml/2006/main">
+  <p:cSld>
+    <p:spTree>
+      <p:nvGrpSpPr>
+        <p:cNvPr id="1" name=""/>
+        <p:cNvGrpSpPr/>
+        <p:nvPr/>
+      </p:nvGrpSpPr>
+      <p:grpSpPr>
+        <a:xfrm>
+          <a:off x="0" y="0"/>
+          <a:ext cx="0" cy="0"/>
+          <a:chOff x="0" y="0"/>
+          <a:chExt cx="0" cy="0"/>
+        </a:xfrm>
+      </p:grpSpPr>
+      <p:pic>
+        <p:nvPicPr>
+          <p:cNvPr id="5" name="Picture 4">
+            <a:extLst>
+              <a:ext uri="{FF2B5EF4-FFF2-40B4-BE49-F238E27FC236}">
+                <a16:creationId xmlns:a16="http://schemas.microsoft.com/office/drawing/2014/main" id="{B675A368-E92C-61FA-326D-9E7FF9C9E489}"/>
+              </a:ext>
+            </a:extLst>
+          </p:cNvPr>
+          <p:cNvPicPr>
+            <a:picLocks noChangeAspect="1"/>
+          </p:cNvPicPr>
+          <p:nvPr/>
+        </p:nvPicPr>
+        <p:blipFill>
+          <a:blip r:embed="rId2"/>
+          <a:srcRect/>
+          <a:stretch/>
+        </p:blipFill>
+        <p:spPr>
+          <a:xfrm>
+            <a:off x="2441984" y="1193098"/>
+            <a:ext cx="4693420" cy="4006919"/>
+          </a:xfrm>
+          <a:prstGeom prst="rect">
+            <a:avLst/>
+          </a:prstGeom>
+        </p:spPr>
+      </p:pic>
+      <p:sp>
+        <p:nvSpPr>
+          <p:cNvPr id="4" name="Slide Number Placeholder 3">
+            <a:extLst>
+              <a:ext uri="{FF2B5EF4-FFF2-40B4-BE49-F238E27FC236}">
+                <a16:creationId xmlns:a16="http://schemas.microsoft.com/office/drawing/2014/main" id="{46B647B5-AF08-734A-367C-B0FF59CAC1EA}"/>
+              </a:ext>
+            </a:extLst>
+          </p:cNvPr>
+          <p:cNvSpPr>
+            <a:spLocks noGrp="1"/>
+          </p:cNvSpPr>
+          <p:nvPr>
+            <p:ph type="sldNum" sz="quarter" idx="12"/>
+          </p:nvPr>
+        </p:nvSpPr>
+        <p:spPr/>
+        <p:txBody>
+          <a:bodyPr/>
+          <a:lstStyle/>
+          <a:p>
+            <a:fld id="{C0343C75-1924-D247-85A3-0CB62E67E5D1}" type="slidenum">
+              <a:rPr lang="en-US" smtClean="0"/>
+              <a:t>8</a:t>
+            </a:fld>
+            <a:endParaRPr lang="en-US"/>
+          </a:p>
+        </p:txBody>
+      </p:sp>
+      <p:pic>
+        <p:nvPicPr>
+          <p:cNvPr id="6" name="Picture 5">
+            <a:extLst>
+              <a:ext uri="{FF2B5EF4-FFF2-40B4-BE49-F238E27FC236}">
+                <a16:creationId xmlns:a16="http://schemas.microsoft.com/office/drawing/2014/main" id="{65DCB94A-DCC8-D25F-EE83-4A6EFECCA86D}"/>
+              </a:ext>
+            </a:extLst>
+          </p:cNvPr>
+          <p:cNvPicPr>
+            <a:picLocks noChangeAspect="1"/>
+          </p:cNvPicPr>
+          <p:nvPr/>
+        </p:nvPicPr>
+        <p:blipFill>
+          <a:blip r:embed="rId3"/>
+          <a:srcRect l="23124" t="15329" r="16490" b="19176"/>
+          <a:stretch>
+            <a:fillRect/>
+          </a:stretch>
+        </p:blipFill>
+        <p:spPr>
+          <a:xfrm>
+            <a:off x="0" y="0"/>
+            <a:ext cx="3452117" cy="3196558"/>
+          </a:xfrm>
+          <a:prstGeom prst="rect">
+            <a:avLst/>
+          </a:prstGeom>
+        </p:spPr>
+      </p:pic>
+      <p:cxnSp>
+        <p:nvCxnSpPr>
+          <p:cNvPr id="8" name="Straight Arrow Connector 7">
+            <a:extLst>
+              <a:ext uri="{FF2B5EF4-FFF2-40B4-BE49-F238E27FC236}">
+                <a16:creationId xmlns:a16="http://schemas.microsoft.com/office/drawing/2014/main" id="{1719C41A-817F-203B-A415-26065AF48843}"/>
+              </a:ext>
+            </a:extLst>
+          </p:cNvPr>
+          <p:cNvCxnSpPr>
+            <a:cxnSpLocks/>
+          </p:cNvCxnSpPr>
+          <p:nvPr/>
+        </p:nvCxnSpPr>
+        <p:spPr>
+          <a:xfrm>
+            <a:off x="2441984" y="2722651"/>
+            <a:ext cx="712182" cy="143839"/>
+          </a:xfrm>
+          <a:prstGeom prst="straightConnector1">
+            <a:avLst/>
+          </a:prstGeom>
+          <a:ln w="38100">
+            <a:solidFill>
+              <a:srgbClr val="FF0000"/>
+            </a:solidFill>
+            <a:tailEnd type="triangle" w="lg" len="lg"/>
+          </a:ln>
+        </p:spPr>
+        <p:style>
+          <a:lnRef idx="2">
+            <a:schemeClr val="accent1"/>
+          </a:lnRef>
+          <a:fillRef idx="0">
+            <a:schemeClr val="accent1"/>
+          </a:fillRef>
+          <a:effectRef idx="1">
+            <a:schemeClr val="accent1"/>
+          </a:effectRef>
+          <a:fontRef idx="minor">
+            <a:schemeClr val="tx1"/>
+          </a:fontRef>
+        </p:style>
+      </p:cxnSp>
+      <p:sp>
+        <p:nvSpPr>
+          <p:cNvPr id="9" name="Oval 8">
+            <a:extLst>
+              <a:ext uri="{FF2B5EF4-FFF2-40B4-BE49-F238E27FC236}">
+                <a16:creationId xmlns:a16="http://schemas.microsoft.com/office/drawing/2014/main" id="{7E404B20-FA4C-4485-A09D-5B75437F16A8}"/>
+              </a:ext>
+            </a:extLst>
+          </p:cNvPr>
+          <p:cNvSpPr/>
+          <p:nvPr/>
+        </p:nvSpPr>
+        <p:spPr>
+          <a:xfrm>
+            <a:off x="2008596" y="2485699"/>
+            <a:ext cx="433388" cy="473905"/>
+          </a:xfrm>
+          <a:prstGeom prst="ellipse">
+            <a:avLst/>
+          </a:prstGeom>
+          <a:noFill/>
+          <a:ln w="28575">
+            <a:solidFill>
+              <a:srgbClr val="FF0000"/>
+            </a:solidFill>
+          </a:ln>
+        </p:spPr>
+        <p:style>
+          <a:lnRef idx="2">
+            <a:schemeClr val="accent1">
+              <a:shade val="15000"/>
+            </a:schemeClr>
+          </a:lnRef>
+          <a:fillRef idx="1">
+            <a:schemeClr val="accent1"/>
+          </a:fillRef>
+          <a:effectRef idx="0">
+            <a:schemeClr val="accent1"/>
+          </a:effectRef>
+          <a:fontRef idx="minor">
+            <a:schemeClr val="lt1"/>
+          </a:fontRef>
+        </p:style>
+        <p:txBody>
+          <a:bodyPr rtlCol="0" anchor="ctr"/>
+          <a:lstStyle/>
+          <a:p>
+            <a:pPr algn="ctr"/>
+            <a:endParaRPr lang="en-US"/>
+          </a:p>
+        </p:txBody>
+      </p:sp>
+    </p:spTree>
+    <p:extLst>
+      <p:ext uri="{BB962C8B-B14F-4D97-AF65-F5344CB8AC3E}">
+        <p14:creationId xmlns:p14="http://schemas.microsoft.com/office/powerpoint/2010/main" val="1100849547"/>
+      </p:ext>
+    </p:extLst>
+  </p:cSld>
+  <p:clrMapOvr>
+    <a:masterClrMapping/>
+  </p:clrMapOvr>
+</p:sld>
+</file>
+
+<file path=ppt/slides/slide9.xml><?xml version="1.0" encoding="utf-8"?>
+<p:sld xmlns:a="http://schemas.openxmlformats.org/drawingml/2006/main" xmlns:r="http://schemas.openxmlformats.org/officeDocument/2006/relationships" xmlns:p="http://schemas.openxmlformats.org/presentationml/2006/main">
+  <p:cSld>
+    <p:spTree>
+      <p:nvGrpSpPr>
+        <p:cNvPr id="1" name=""/>
+        <p:cNvGrpSpPr/>
+        <p:nvPr/>
+      </p:nvGrpSpPr>
+      <p:grpSpPr>
+        <a:xfrm>
+          <a:off x="0" y="0"/>
+          <a:ext cx="0" cy="0"/>
+          <a:chOff x="0" y="0"/>
+          <a:chExt cx="0" cy="0"/>
+        </a:xfrm>
+      </p:grpSpPr>
+      <p:sp>
+        <p:nvSpPr>
+          <p:cNvPr id="4" name="Slide Number Placeholder 3">
+            <a:extLst>
+              <a:ext uri="{FF2B5EF4-FFF2-40B4-BE49-F238E27FC236}">
+                <a16:creationId xmlns:a16="http://schemas.microsoft.com/office/drawing/2014/main" id="{07A8190E-B317-4BB7-4347-B9D794589E96}"/>
+              </a:ext>
+            </a:extLst>
+          </p:cNvPr>
+          <p:cNvSpPr>
+            <a:spLocks noGrp="1"/>
+          </p:cNvSpPr>
+          <p:nvPr>
+            <p:ph type="sldNum" sz="quarter" idx="12"/>
+          </p:nvPr>
+        </p:nvSpPr>
+        <p:spPr/>
+        <p:txBody>
+          <a:bodyPr/>
+          <a:lstStyle/>
+          <a:p>
+            <a:fld id="{C0343C75-1924-D247-85A3-0CB62E67E5D1}" type="slidenum">
+              <a:rPr lang="en-US" smtClean="0"/>
+              <a:t>9</a:t>
+            </a:fld>
+            <a:endParaRPr lang="en-US"/>
+          </a:p>
+        </p:txBody>
+      </p:sp>
+      <p:pic>
+        <p:nvPicPr>
+          <p:cNvPr id="5" name="Picture 4">
+            <a:extLst>
+              <a:ext uri="{FF2B5EF4-FFF2-40B4-BE49-F238E27FC236}">
+                <a16:creationId xmlns:a16="http://schemas.microsoft.com/office/drawing/2014/main" id="{AB9AF3D8-D697-F0F1-0C95-527E536AA0E8}"/>
+              </a:ext>
+            </a:extLst>
+          </p:cNvPr>
+          <p:cNvPicPr>
+            <a:picLocks noChangeAspect="1"/>
+          </p:cNvPicPr>
+          <p:nvPr/>
+        </p:nvPicPr>
+        <p:blipFill>
+          <a:blip r:embed="rId2"/>
+          <a:srcRect l="22329" t="14555" r="15344" b="17937"/>
+          <a:stretch>
+            <a:fillRect/>
+          </a:stretch>
+        </p:blipFill>
+        <p:spPr>
+          <a:xfrm>
+            <a:off x="2149866" y="1189234"/>
+            <a:ext cx="4844268" cy="4479532"/>
+          </a:xfrm>
+          <a:prstGeom prst="rect">
+            <a:avLst/>
+          </a:prstGeom>
+        </p:spPr>
+      </p:pic>
+    </p:spTree>
+    <p:extLst>
+      <p:ext uri="{BB962C8B-B14F-4D97-AF65-F5344CB8AC3E}">
+        <p14:creationId xmlns:p14="http://schemas.microsoft.com/office/powerpoint/2010/main" val="3973545010"/>
       </p:ext>
     </p:extLst>
   </p:cSld>

--- a/DAEN489S26/week13_slides.pptx
+++ b/DAEN489S26/week13_slides.pptx
@@ -227,7 +227,7 @@
           <a:p>
             <a:fld id="{704FB6DC-B598-8B49-8FDB-37BE75E655AD}" type="datetimeFigureOut">
               <a:rPr lang="en-US" smtClean="0"/>
-              <a:t>4/14/26</a:t>
+              <a:t>4/16/26</a:t>
             </a:fld>
             <a:endParaRPr lang="en-US"/>
           </a:p>
@@ -625,7 +625,7 @@
           <a:p>
             <a:fld id="{558EA6D9-2D7F-9442-BED1-4D7FFC9A34F4}" type="datetime1">
               <a:rPr lang="en-US" smtClean="0"/>
-              <a:t>4/14/26</a:t>
+              <a:t>4/16/26</a:t>
             </a:fld>
             <a:endParaRPr lang="en-US"/>
           </a:p>
@@ -795,7 +795,7 @@
           <a:p>
             <a:fld id="{2EAE58ED-569E-7141-BEA4-8F66F85D6EA8}" type="datetime1">
               <a:rPr lang="en-US" smtClean="0"/>
-              <a:t>4/14/26</a:t>
+              <a:t>4/16/26</a:t>
             </a:fld>
             <a:endParaRPr lang="en-US"/>
           </a:p>
@@ -1041,7 +1041,7 @@
           <a:p>
             <a:fld id="{A832CD10-D7BB-1A41-A802-BCEB6EE7274C}" type="datetime1">
               <a:rPr lang="en-US" smtClean="0"/>
-              <a:t>4/14/26</a:t>
+              <a:t>4/16/26</a:t>
             </a:fld>
             <a:endParaRPr lang="en-US"/>
           </a:p>
@@ -1283,7 +1283,7 @@
           <a:p>
             <a:fld id="{37563A2C-1A5C-EB4D-A972-6AE3285E62FE}" type="datetime1">
               <a:rPr lang="en-US" smtClean="0"/>
-              <a:t>4/14/26</a:t>
+              <a:t>4/16/26</a:t>
             </a:fld>
             <a:endParaRPr lang="en-US"/>
           </a:p>
@@ -1671,7 +1671,7 @@
           <a:p>
             <a:fld id="{5CC0F2D4-C57D-2449-85CE-67A0F42FDA3B}" type="datetime1">
               <a:rPr lang="en-US" smtClean="0"/>
-              <a:t>4/14/26</a:t>
+              <a:t>4/16/26</a:t>
             </a:fld>
             <a:endParaRPr lang="en-US"/>
           </a:p>
@@ -1789,7 +1789,7 @@
           <a:p>
             <a:fld id="{14165B4F-A2D4-8548-B798-9B676580887F}" type="datetime1">
               <a:rPr lang="en-US" smtClean="0"/>
-              <a:t>4/14/26</a:t>
+              <a:t>4/16/26</a:t>
             </a:fld>
             <a:endParaRPr lang="en-US"/>
           </a:p>
@@ -1884,7 +1884,7 @@
           <a:p>
             <a:fld id="{7623453A-5CCA-2B47-B840-00C815B24B38}" type="datetime1">
               <a:rPr lang="en-US" smtClean="0"/>
-              <a:t>4/14/26</a:t>
+              <a:t>4/16/26</a:t>
             </a:fld>
             <a:endParaRPr lang="en-US"/>
           </a:p>
@@ -2096,7 +2096,7 @@
           <a:p>
             <a:fld id="{EE088FA9-E09B-F247-9C69-3141F5729F41}" type="datetime1">
               <a:rPr lang="en-US" smtClean="0"/>
-              <a:t>4/14/26</a:t>
+              <a:t>4/16/26</a:t>
             </a:fld>
             <a:endParaRPr lang="en-US"/>
           </a:p>
@@ -3683,8 +3683,8 @@
           </a:p>
         </p:txBody>
       </p:sp>
-      <mc:AlternateContent xmlns:mc="http://schemas.openxmlformats.org/markup-compatibility/2006">
-        <mc:Choice xmlns:a14="http://schemas.microsoft.com/office/drawing/2010/main" Requires="a14">
+      <mc:AlternateContent xmlns:mc="http://schemas.openxmlformats.org/markup-compatibility/2006" xmlns:a14="http://schemas.microsoft.com/office/drawing/2010/main">
+        <mc:Choice Requires="a14">
           <p:sp>
             <p:nvSpPr>
               <p:cNvPr id="4" name="Content Placeholder 3">
@@ -3941,13 +3941,7 @@
                             <a:rPr lang="en-US" i="1">
                               <a:latin typeface="Cambria Math" panose="02040503050406030204" pitchFamily="18" charset="0"/>
                             </a:rPr>
-                            <m:t>𝑖</m:t>
-                          </m:r>
-                          <m:r>
-                            <a:rPr lang="en-US" i="1">
-                              <a:latin typeface="Cambria Math" panose="02040503050406030204" pitchFamily="18" charset="0"/>
-                            </a:rPr>
-                            <m:t>𝑗</m:t>
+                            <m:t>𝑖𝑗</m:t>
                           </m:r>
                         </m:sub>
                       </m:sSub>
@@ -3992,7 +3986,7 @@
             </p:txBody>
           </p:sp>
         </mc:Choice>
-        <mc:Fallback>
+        <mc:Fallback xmlns="">
           <p:sp>
             <p:nvSpPr>
               <p:cNvPr id="4" name="Content Placeholder 3">
@@ -5765,8 +5759,8 @@
           </p:txBody>
         </p:sp>
       </p:grpSp>
-      <mc:AlternateContent xmlns:mc="http://schemas.openxmlformats.org/markup-compatibility/2006">
-        <mc:Choice xmlns:a14="http://schemas.microsoft.com/office/drawing/2010/main" Requires="a14">
+      <mc:AlternateContent xmlns:mc="http://schemas.openxmlformats.org/markup-compatibility/2006" xmlns:a14="http://schemas.microsoft.com/office/drawing/2010/main">
+        <mc:Choice Requires="a14">
           <p:sp>
             <p:nvSpPr>
               <p:cNvPr id="5" name="Content Placeholder 2">
@@ -6095,7 +6089,7 @@
             </p:txBody>
           </p:sp>
         </mc:Choice>
-        <mc:Fallback>
+        <mc:Fallback xmlns="">
           <p:sp>
             <p:nvSpPr>
               <p:cNvPr id="5" name="Content Placeholder 2">
@@ -7526,8 +7520,8 @@
           </a:p>
         </p:txBody>
       </p:sp>
-      <mc:AlternateContent xmlns:mc="http://schemas.openxmlformats.org/markup-compatibility/2006">
-        <mc:Choice xmlns:a14="http://schemas.microsoft.com/office/drawing/2010/main" Requires="a14">
+      <mc:AlternateContent xmlns:mc="http://schemas.openxmlformats.org/markup-compatibility/2006" xmlns:a14="http://schemas.microsoft.com/office/drawing/2010/main">
+        <mc:Choice Requires="a14">
           <p:sp>
             <p:nvSpPr>
               <p:cNvPr id="4" name="Content Placeholder 3">
@@ -7736,7 +7730,7 @@
             </p:txBody>
           </p:sp>
         </mc:Choice>
-        <mc:Fallback>
+        <mc:Fallback xmlns="">
           <p:sp>
             <p:nvSpPr>
               <p:cNvPr id="4" name="Content Placeholder 3">
@@ -8949,6 +8943,35 @@
           <a:chExt cx="0" cy="0"/>
         </a:xfrm>
       </p:grpSpPr>
+      <p:pic>
+        <p:nvPicPr>
+          <p:cNvPr id="5" name="Picture 4" descr="A red and black target with white text&#10;&#10;AI-generated content may be incorrect.">
+            <a:extLst>
+              <a:ext uri="{FF2B5EF4-FFF2-40B4-BE49-F238E27FC236}">
+                <a16:creationId xmlns:a16="http://schemas.microsoft.com/office/drawing/2014/main" id="{155B7421-282C-6C15-526B-D9F40251E880}"/>
+              </a:ext>
+            </a:extLst>
+          </p:cNvPr>
+          <p:cNvPicPr>
+            <a:picLocks noChangeAspect="1"/>
+          </p:cNvPicPr>
+          <p:nvPr/>
+        </p:nvPicPr>
+        <p:blipFill>
+          <a:blip r:embed="rId2"/>
+          <a:srcRect b="7461"/>
+          <a:stretch/>
+        </p:blipFill>
+        <p:spPr>
+          <a:xfrm>
+            <a:off x="3199615" y="216053"/>
+            <a:ext cx="2744769" cy="2743200"/>
+          </a:xfrm>
+          <a:prstGeom prst="rect">
+            <a:avLst/>
+          </a:prstGeom>
+        </p:spPr>
+      </p:pic>
       <p:sp>
         <p:nvSpPr>
           <p:cNvPr id="2" name="Title 1">
@@ -8978,9 +9001,12 @@
               <a:rPr lang="en-US" dirty="0"/>
               <a:t> </a:t>
             </a:r>
-            <a:r>
-              <a:rPr lang="en-US" baseline="30000" dirty="0"/>
-              <a:t>(Vignettes)</a:t>
+            <a:br>
+              <a:rPr lang="en-US" dirty="0"/>
+            </a:br>
+            <a:r>
+              <a:rPr lang="en-US" dirty="0"/>
+              <a:t>Vignettes</a:t>
             </a:r>
           </a:p>
         </p:txBody>
@@ -9001,118 +9027,132 @@
             <p:ph idx="1"/>
           </p:nvPr>
         </p:nvSpPr>
-        <p:spPr/>
+        <p:spPr>
+          <a:xfrm>
+            <a:off x="457200" y="3154166"/>
+            <a:ext cx="8229600" cy="3567309"/>
+          </a:xfrm>
+        </p:spPr>
         <p:txBody>
           <a:bodyPr>
-            <a:normAutofit lnSpcReduction="10000"/>
+            <a:normAutofit/>
           </a:bodyPr>
           <a:lstStyle/>
           <a:p>
             <a:r>
-              <a:rPr lang="en-US" dirty="0"/>
+              <a:rPr lang="en-US" sz="1600" b="1" dirty="0"/>
               <a:t>Exploratory spatial data analysis</a:t>
             </a:r>
             <a:br>
-              <a:rPr lang="en-US" dirty="0"/>
+              <a:rPr lang="en-US" sz="1600" dirty="0"/>
             </a:br>
             <a:r>
-              <a:rPr lang="en-US" dirty="0">
-                <a:hlinkClick r:id="rId2"/>
+              <a:rPr lang="en-US" sz="1600" dirty="0">
+                <a:hlinkClick r:id="rId3"/>
               </a:rPr>
               <a:t>https://cran.r-project.org/web/packages/geostan/vignettes/measuring-sa.html</a:t>
             </a:r>
-            <a:endParaRPr lang="en-US" dirty="0"/>
-          </a:p>
-          <a:p>
-            <a:r>
-              <a:rPr lang="en-US" dirty="0"/>
-              <a:t>Spatial analysis (with </a:t>
-            </a:r>
-            <a:r>
-              <a:rPr lang="en-US" dirty="0" err="1"/>
+            <a:endParaRPr lang="en-US" sz="1600" dirty="0"/>
+          </a:p>
+          <a:p>
+            <a:r>
+              <a:rPr lang="en-US" sz="1600" b="1" dirty="0"/>
+              <a:t>Spatial analysis </a:t>
+            </a:r>
+            <a:r>
+              <a:rPr lang="en-US" sz="1600" dirty="0"/>
+              <a:t>(with </a:t>
+            </a:r>
+            <a:r>
+              <a:rPr lang="en-US" sz="1600" dirty="0" err="1"/>
               <a:t>geostan</a:t>
             </a:r>
             <a:r>
-              <a:rPr lang="en-US" dirty="0"/>
+              <a:rPr lang="en-US" sz="1600" dirty="0"/>
               <a:t>)</a:t>
             </a:r>
             <a:br>
-              <a:rPr lang="en-US" dirty="0"/>
+              <a:rPr lang="en-US" sz="1600" dirty="0"/>
             </a:br>
             <a:r>
-              <a:rPr lang="en-US" dirty="0">
-                <a:hlinkClick r:id="rId3"/>
+              <a:rPr lang="en-US" sz="1600" dirty="0">
+                <a:hlinkClick r:id="rId4"/>
               </a:rPr>
               <a:t>https://cran.r-project.org/web/packages/geostan/vignettes/spatial-analysis.html</a:t>
             </a:r>
-            <a:endParaRPr lang="en-US" dirty="0"/>
-          </a:p>
-          <a:p>
-            <a:r>
-              <a:rPr lang="en-US" dirty="0"/>
+            <a:endParaRPr lang="en-US" sz="1600" dirty="0"/>
+          </a:p>
+          <a:p>
+            <a:r>
+              <a:rPr lang="en-US" sz="1600" b="1" dirty="0"/>
               <a:t>Spatial measurement error models</a:t>
             </a:r>
             <a:br>
-              <a:rPr lang="en-US" dirty="0"/>
+              <a:rPr lang="en-US" sz="1600" dirty="0"/>
             </a:br>
             <a:r>
-              <a:rPr lang="en-US" dirty="0">
-                <a:hlinkClick r:id="rId4"/>
+              <a:rPr lang="en-US" sz="1600" dirty="0">
+                <a:hlinkClick r:id="rId5"/>
               </a:rPr>
               <a:t>https://cran.r-project.org/web/packages/geostan/vignettes/spatial-me-models.html</a:t>
             </a:r>
-            <a:endParaRPr lang="en-US" dirty="0"/>
-          </a:p>
-          <a:p>
-            <a:r>
-              <a:rPr lang="en-US" dirty="0"/>
-              <a:t>Custom spatial models (with </a:t>
-            </a:r>
-            <a:r>
-              <a:rPr lang="en-US" dirty="0" err="1"/>
+            <a:endParaRPr lang="en-US" sz="1600" dirty="0"/>
+          </a:p>
+          <a:p>
+            <a:r>
+              <a:rPr lang="en-US" sz="1600" b="1" dirty="0"/>
+              <a:t>Custom spatial models </a:t>
+            </a:r>
+            <a:r>
+              <a:rPr lang="en-US" sz="1600" dirty="0"/>
+              <a:t>(with </a:t>
+            </a:r>
+            <a:r>
+              <a:rPr lang="en-US" sz="1600" dirty="0" err="1"/>
               <a:t>RStan</a:t>
             </a:r>
             <a:r>
-              <a:rPr lang="en-US" dirty="0"/>
+              <a:rPr lang="en-US" sz="1600" dirty="0"/>
               <a:t> and </a:t>
             </a:r>
             <a:r>
-              <a:rPr lang="en-US" dirty="0" err="1"/>
+              <a:rPr lang="en-US" sz="1600" dirty="0" err="1"/>
               <a:t>geostan</a:t>
             </a:r>
             <a:r>
-              <a:rPr lang="en-US" dirty="0"/>
+              <a:rPr lang="en-US" sz="1600" dirty="0"/>
               <a:t>)</a:t>
             </a:r>
             <a:br>
-              <a:rPr lang="en-US" dirty="0"/>
+              <a:rPr lang="en-US" sz="1600" dirty="0"/>
             </a:br>
             <a:r>
-              <a:rPr lang="en-US" dirty="0">
-                <a:hlinkClick r:id="rId5"/>
+              <a:rPr lang="en-US" sz="1600" dirty="0">
+                <a:hlinkClick r:id="rId6"/>
               </a:rPr>
               <a:t>https://cran.r-project.org/web/packages/geostan/vignettes/custom-spatial-models.html</a:t>
             </a:r>
-            <a:endParaRPr lang="en-US" dirty="0"/>
-          </a:p>
-          <a:p>
-            <a:r>
-              <a:rPr lang="en-US" dirty="0"/>
+            <a:endParaRPr lang="en-US" sz="1600" dirty="0"/>
+          </a:p>
+          <a:p>
+            <a:r>
+              <a:rPr lang="en-US" sz="1600" b="1" dirty="0">
+                <a:highlight>
+                  <a:srgbClr val="FFFF00"/>
+                </a:highlight>
+              </a:rPr>
               <a:t>Raster regression</a:t>
             </a:r>
             <a:br>
-              <a:rPr lang="en-US" dirty="0"/>
+              <a:rPr lang="en-US" sz="1600" dirty="0"/>
             </a:br>
             <a:r>
-              <a:rPr lang="en-US" dirty="0">
-                <a:hlinkClick r:id="rId6"/>
+              <a:rPr lang="en-US" sz="1600" dirty="0">
+                <a:hlinkClick r:id="rId7"/>
               </a:rPr>
               <a:t>https://cran.r-project.org/web/packages/geostan/vignettes/raster-regression.html</a:t>
             </a:r>
-            <a:endParaRPr lang="en-US" dirty="0"/>
-          </a:p>
-          <a:p>
-            <a:endParaRPr lang="en-US" dirty="0"/>
+            <a:endParaRPr lang="en-US" sz="1600" dirty="0"/>
           </a:p>
         </p:txBody>
       </p:sp>
@@ -11615,8 +11655,8 @@
           </a:p>
         </p:txBody>
       </p:sp>
-      <mc:AlternateContent xmlns:mc="http://schemas.openxmlformats.org/markup-compatibility/2006">
-        <mc:Choice xmlns:a14="http://schemas.microsoft.com/office/drawing/2010/main" Requires="a14">
+      <mc:AlternateContent xmlns:mc="http://schemas.openxmlformats.org/markup-compatibility/2006" xmlns:a14="http://schemas.microsoft.com/office/drawing/2010/main">
+        <mc:Choice Requires="a14">
           <p:sp>
             <p:nvSpPr>
               <p:cNvPr id="3" name="Content Placeholder 2">
@@ -11854,7 +11894,7 @@
             </p:txBody>
           </p:sp>
         </mc:Choice>
-        <mc:Fallback>
+        <mc:Fallback xmlns="">
           <p:sp>
             <p:nvSpPr>
               <p:cNvPr id="3" name="Content Placeholder 2">
@@ -12428,8 +12468,8 @@
           <a:chExt cx="0" cy="0"/>
         </a:xfrm>
       </p:grpSpPr>
-      <mc:AlternateContent xmlns:mc="http://schemas.openxmlformats.org/markup-compatibility/2006">
-        <mc:Choice xmlns:a14="http://schemas.microsoft.com/office/drawing/2010/main" Requires="a14">
+      <mc:AlternateContent xmlns:mc="http://schemas.openxmlformats.org/markup-compatibility/2006" xmlns:a14="http://schemas.microsoft.com/office/drawing/2010/main">
+        <mc:Choice Requires="a14">
           <p:sp>
             <p:nvSpPr>
               <p:cNvPr id="16" name="Content Placeholder 15">
@@ -12663,7 +12703,7 @@
             </p:txBody>
           </p:sp>
         </mc:Choice>
-        <mc:Fallback>
+        <mc:Fallback xmlns="">
           <p:sp>
             <p:nvSpPr>
               <p:cNvPr id="16" name="Content Placeholder 15">
